--- a/06.00-idea/learning-hub/_assets/images.v2.pptx
+++ b/06.00-idea/learning-hub/_assets/images.v2.pptx
@@ -4,12 +4,12 @@
   <p:sldMasterIdLst>
     <p:sldMasterId id="2147483648" r:id="rId1"/>
   </p:sldMasterIdLst>
+  <p:notesMasterIdLst>
+    <p:notesMasterId r:id="rId3"/>
+  </p:notesMasterIdLst>
   <p:sldIdLst>
     <p:sldId id="256" r:id="rId2"/>
   </p:sldIdLst>
-  <p:notesMasterIdLst>
-    <p:notesMasterId r:id="rId3"/>
-  </p:notesMasterIdLst>
   <p:sldSz cx="12192000" cy="6858000"/>
   <p:notesSz cx="6858000" cy="12192000"/>
   <p:defaultTextStyle>
@@ -104,6 +104,11 @@
       </a:defRPr>
     </a:lvl9pPr>
   </p:defaultTextStyle>
+  <p:extLst>
+    <p:ext uri="{EFAFB233-063F-42B5-8137-9DF3F51BA10A}">
+      <p15:sldGuideLst xmlns:p15="http://schemas.microsoft.com/office/powerpoint/2012/main"/>
+    </p:ext>
+  </p:extLst>
 </p:presentation>
 </file>
 
@@ -129,234 +134,10 @@
           <a:chExt cx="0" cy="0"/>
         </a:xfrm>
       </p:grpSpPr>
-      <p:sp>
-        <p:nvSpPr>
-          <p:cNvPr id="2" name="Header Placeholder 1"/>
-          <p:cNvSpPr>
-            <a:spLocks noGrp="1"/>
-          </p:cNvSpPr>
-          <p:nvPr>
-            <p:ph type="hdr" sz="quarter"/>
-          </p:nvPr>
-        </p:nvSpPr>
-        <p:spPr>
-          <a:xfrm>
-            <a:off x="0" y="0"/>
-            <a:ext cx="2971800" cy="458788"/>
-          </a:xfrm>
-          <a:prstGeom prst="rect">
-            <a:avLst/>
-          </a:prstGeom>
-        </p:spPr>
-        <p:txBody>
-          <a:bodyPr vert="horz" lIns="91440" tIns="45720" rIns="91440" bIns="45720" rtlCol="0"/>
-          <a:lstStyle>
-            <a:lvl1pPr algn="l">
-              <a:defRPr sz="1200"/>
-            </a:lvl1pPr>
-          </a:lstStyle>
-          <a:p>
-            <a:endParaRPr lang="en-US"/>
-          </a:p>
-        </p:txBody>
-      </p:sp>
-      <p:sp>
-        <p:nvSpPr>
-          <p:cNvPr id="3" name="Date Placeholder 2"/>
-          <p:cNvSpPr>
-            <a:spLocks noGrp="1"/>
-          </p:cNvSpPr>
-          <p:nvPr>
-            <p:ph type="dt" idx="1"/>
-          </p:nvPr>
-        </p:nvSpPr>
-        <p:spPr>
-          <a:xfrm>
-            <a:off x="3884613" y="0"/>
-            <a:ext cx="2971800" cy="458788"/>
-          </a:xfrm>
-          <a:prstGeom prst="rect">
-            <a:avLst/>
-          </a:prstGeom>
-        </p:spPr>
-        <p:txBody>
-          <a:bodyPr vert="horz" lIns="91440" tIns="45720" rIns="91440" bIns="45720" rtlCol="0"/>
-          <a:lstStyle>
-            <a:lvl1pPr algn="r">
-              <a:defRPr sz="1200"/>
-            </a:lvl1pPr>
-          </a:lstStyle>
-          <a:p>
-            <a:fld id="{5282F153-3F37-0F45-9E97-73ACFA13230C}" type="datetimeFigureOut">
-              <a:rPr lang="en-US"/>
-              <a:t>7/23/19</a:t>
-            </a:fld>
-            <a:endParaRPr lang="en-US"/>
-          </a:p>
-        </p:txBody>
-      </p:sp>
-      <p:sp>
-        <p:nvSpPr>
-          <p:cNvPr id="4" name="Slide Image Placeholder 3"/>
-          <p:cNvSpPr>
-            <a:spLocks noGrp="1" noRot="1" noChangeAspect="1"/>
-          </p:cNvSpPr>
-          <p:nvPr>
-            <p:ph type="sldImg" idx="2"/>
-          </p:nvPr>
-        </p:nvSpPr>
-        <p:spPr>
-          <a:xfrm>
-            <a:off x="685800" y="1143000"/>
-            <a:ext cx="5486400" cy="3086100"/>
-          </a:xfrm>
-          <a:prstGeom prst="rect">
-            <a:avLst/>
-          </a:prstGeom>
-          <a:noFill/>
-          <a:ln w="12700">
-            <a:solidFill>
-              <a:prstClr val="black"/>
-            </a:solidFill>
-          </a:ln>
-        </p:spPr>
-        <p:txBody>
-          <a:bodyPr vert="horz" lIns="91440" tIns="45720" rIns="91440" bIns="45720" rtlCol="0" anchor="ctr"/>
-          <a:lstStyle/>
-          <a:p>
-            <a:endParaRPr lang="en-US"/>
-          </a:p>
-        </p:txBody>
-      </p:sp>
-      <p:sp>
-        <p:nvSpPr>
-          <p:cNvPr id="5" name="Notes Placeholder 4"/>
-          <p:cNvSpPr>
-            <a:spLocks noGrp="1"/>
-          </p:cNvSpPr>
-          <p:nvPr>
-            <p:ph type="body" sz="quarter" idx="3"/>
-          </p:nvPr>
-        </p:nvSpPr>
-        <p:spPr>
-          <a:xfrm>
-            <a:off x="685800" y="4400550"/>
-            <a:ext cx="5486400" cy="3600450"/>
-          </a:xfrm>
-          <a:prstGeom prst="rect">
-            <a:avLst/>
-          </a:prstGeom>
-        </p:spPr>
-        <p:txBody>
-          <a:bodyPr vert="horz" lIns="91440" tIns="45720" rIns="91440" bIns="45720" rtlCol="0"/>
-          <a:lstStyle/>
-          <a:p>
-            <a:pPr lvl="0"/>
-            <a:r>
-              <a:rPr lang="en-US"/>
-              <a:t>Click to edit Master text styles</a:t>
-            </a:r>
-          </a:p>
-          <a:p>
-            <a:pPr lvl="1"/>
-            <a:r>
-              <a:rPr lang="en-US"/>
-              <a:t>Second level</a:t>
-            </a:r>
-          </a:p>
-          <a:p>
-            <a:pPr lvl="2"/>
-            <a:r>
-              <a:rPr lang="en-US"/>
-              <a:t>Third level</a:t>
-            </a:r>
-          </a:p>
-          <a:p>
-            <a:pPr lvl="3"/>
-            <a:r>
-              <a:rPr lang="en-US"/>
-              <a:t>Fourth level</a:t>
-            </a:r>
-          </a:p>
-          <a:p>
-            <a:pPr lvl="4"/>
-            <a:r>
-              <a:rPr lang="en-US"/>
-              <a:t>Fifth level</a:t>
-            </a:r>
-          </a:p>
-        </p:txBody>
-      </p:sp>
-      <p:sp>
-        <p:nvSpPr>
-          <p:cNvPr id="6" name="Footer Placeholder 5"/>
-          <p:cNvSpPr>
-            <a:spLocks noGrp="1"/>
-          </p:cNvSpPr>
-          <p:nvPr>
-            <p:ph type="ftr" sz="quarter" idx="4"/>
-          </p:nvPr>
-        </p:nvSpPr>
-        <p:spPr>
-          <a:xfrm>
-            <a:off x="0" y="8685213"/>
-            <a:ext cx="2971800" cy="458787"/>
-          </a:xfrm>
-          <a:prstGeom prst="rect">
-            <a:avLst/>
-          </a:prstGeom>
-        </p:spPr>
-        <p:txBody>
-          <a:bodyPr vert="horz" lIns="91440" tIns="45720" rIns="91440" bIns="45720" rtlCol="0" anchor="b"/>
-          <a:lstStyle>
-            <a:lvl1pPr algn="l">
-              <a:defRPr sz="1200"/>
-            </a:lvl1pPr>
-          </a:lstStyle>
-          <a:p>
-            <a:endParaRPr lang="en-US"/>
-          </a:p>
-        </p:txBody>
-      </p:sp>
-      <p:sp>
-        <p:nvSpPr>
-          <p:cNvPr id="7" name="Slide Number Placeholder 6"/>
-          <p:cNvSpPr>
-            <a:spLocks noGrp="1"/>
-          </p:cNvSpPr>
-          <p:nvPr>
-            <p:ph type="sldNum" sz="quarter" idx="5"/>
-          </p:nvPr>
-        </p:nvSpPr>
-        <p:spPr>
-          <a:xfrm>
-            <a:off x="3884613" y="8685213"/>
-            <a:ext cx="2971800" cy="458787"/>
-          </a:xfrm>
-          <a:prstGeom prst="rect">
-            <a:avLst/>
-          </a:prstGeom>
-        </p:spPr>
-        <p:txBody>
-          <a:bodyPr vert="horz" lIns="91440" tIns="45720" rIns="91440" bIns="45720" rtlCol="0" anchor="b"/>
-          <a:lstStyle>
-            <a:lvl1pPr algn="r">
-              <a:defRPr sz="1200"/>
-            </a:lvl1pPr>
-          </a:lstStyle>
-          <a:p>
-            <a:fld id="{CE5E9CC1-C706-0F49-92D6-E571CC5EEA8F}" type="slidenum">
-              <a:rPr lang="en-US"/>
-              <a:t>‹#›</a:t>
-            </a:fld>
-            <a:endParaRPr lang="en-US"/>
-          </a:p>
-        </p:txBody>
-      </p:sp>
     </p:spTree>
     <p:extLst>
       <p:ext uri="{BB962C8B-B14F-4D97-AF65-F5344CB8AC3E}">
-        <p14:creationId xmlns:p14="http://schemas.microsoft.com/office/powerpoint/2010/main" val="1024086991"/>
+        <p14:creationId xmlns:p14="http://schemas.microsoft.com/office/powerpoint/2010/main" val="2168702167"/>
       </p:ext>
     </p:extLst>
   </p:cSld>
@@ -500,10 +281,6 @@
           <a:bodyPr/>
           <a:lstStyle/>
           <a:p>
-            <a:r>
-              <a:rPr lang="en-US" dirty="0"/>
-              <a:t/>
-            </a:r>
             <a:endParaRPr lang="en-US" dirty="0"/>
           </a:p>
         </p:txBody>
@@ -577,6 +354,11 @@
 <file path=ppt/slideMasters/slideMaster1.xml><?xml version="1.0" encoding="utf-8"?>
 <p:sldMaster xmlns:a="http://schemas.openxmlformats.org/drawingml/2006/main" xmlns:r="http://schemas.openxmlformats.org/officeDocument/2006/relationships" xmlns:p="http://schemas.openxmlformats.org/presentationml/2006/main">
   <p:cSld>
+    <p:bg>
+      <p:bgRef idx="1001">
+        <a:schemeClr val="bg1"/>
+      </p:bgRef>
+    </p:bg>
     <p:spTree>
       <p:nvGrpSpPr>
         <p:cNvPr id="1" name=""/>
@@ -859,6 +641,7 @@
         <a:solidFill>
           <a:srgbClr val="F4F7FC"/>
         </a:solidFill>
+        <a:effectLst/>
       </p:bgPr>
     </p:bg>
     <p:spTree>
@@ -896,7 +679,7 @@
           <a:bodyPr wrap="square" lIns="0" tIns="0" rIns="0" bIns="0" rtlCol="0" anchor="ctr"/>
           <a:lstStyle/>
           <a:p>
-            <a:pPr indent="0" marL="0">
+            <a:pPr marL="0" indent="0">
               <a:buNone/>
             </a:pPr>
             <a:r>
@@ -935,7 +718,7 @@
           <a:bodyPr wrap="square" lIns="0" tIns="0" rIns="0" bIns="0" rtlCol="0" anchor="ctr"/>
           <a:lstStyle/>
           <a:p>
-            <a:pPr indent="0" marL="0">
+            <a:pPr marL="0" indent="0">
               <a:buNone/>
             </a:pPr>
             <a:r>
@@ -979,24 +762,31 @@
             <a:prstDash val="solid"/>
           </a:ln>
           <a:effectLst>
-            <a:outerShdw sx="100000" sy="100000" kx="0" ky="0" algn="bl" rotWithShape="0" blurRad="101600" dist="25400" dir="8100000">
+            <a:outerShdw blurRad="101600" dist="25400" dir="8100000" algn="bl" rotWithShape="0">
               <a:srgbClr val="000000">
                 <a:alpha val="10000"/>
               </a:srgbClr>
             </a:outerShdw>
           </a:effectLst>
         </p:spPr>
+        <p:txBody>
+          <a:bodyPr/>
+          <a:lstStyle/>
+          <a:p>
+            <a:endParaRPr lang="en-US"/>
+          </a:p>
+        </p:txBody>
       </p:sp>
       <p:pic>
         <p:nvPicPr>
-          <p:cNvPr id="5" name="Image 0" descr="preencoded.png">    </p:cNvPr>
+          <p:cNvPr id="5" name="Image 0" descr="preencoded.png"/>
           <p:cNvPicPr>
             <a:picLocks noChangeAspect="1"/>
           </p:cNvPicPr>
           <p:nvPr/>
         </p:nvPicPr>
         <p:blipFill>
-          <a:blip r:embed="rId1"/>
+          <a:blip r:embed="rId3"/>
           <a:stretch>
             <a:fillRect/>
           </a:stretch>
@@ -1032,7 +822,7 @@
           <a:bodyPr wrap="square" lIns="0" tIns="0" rIns="0" bIns="0" rtlCol="0" anchor="ctr"/>
           <a:lstStyle/>
           <a:p>
-            <a:pPr indent="0" marL="0">
+            <a:pPr marL="0" indent="0">
               <a:buNone/>
             </a:pPr>
             <a:r>
@@ -1044,11 +834,8 @@
                 <a:ea typeface="Trebuchet MS" pitchFamily="34" charset="-122"/>
                 <a:cs typeface="Trebuchet MS" pitchFamily="34" charset="-120"/>
               </a:rPr>
-              <a:t>PROMPT-ENGINEERING ARTIFACTS</a:t>
-            </a:r>
-            <a:pPr indent="0" marL="0">
-              <a:buNone/>
-            </a:pPr>
+              <a:t>SELF UPDATING PROMPT-ENGINEERING ARTIFACTS</a:t>
+            </a:r>
             <a:r>
               <a:rPr lang="en-US" sz="900" dirty="0">
                 <a:solidFill>
@@ -1090,17 +877,24 @@
             <a:prstDash val="solid"/>
           </a:ln>
         </p:spPr>
+        <p:txBody>
+          <a:bodyPr/>
+          <a:lstStyle/>
+          <a:p>
+            <a:endParaRPr lang="en-US"/>
+          </a:p>
+        </p:txBody>
       </p:sp>
       <p:pic>
         <p:nvPicPr>
-          <p:cNvPr id="8" name="Image 1" descr="preencoded.png">    </p:cNvPr>
+          <p:cNvPr id="8" name="Image 1" descr="preencoded.png"/>
           <p:cNvPicPr>
             <a:picLocks noChangeAspect="1"/>
           </p:cNvPicPr>
           <p:nvPr/>
         </p:nvPicPr>
         <p:blipFill>
-          <a:blip r:embed="rId2"/>
+          <a:blip r:embed="rId4"/>
           <a:stretch>
             <a:fillRect/>
           </a:stretch>
@@ -1136,7 +930,7 @@
           <a:bodyPr wrap="square" lIns="0" tIns="0" rIns="0" bIns="0" rtlCol="0" anchor="ctr"/>
           <a:lstStyle/>
           <a:p>
-            <a:pPr indent="0" marL="0">
+            <a:pPr marL="0" indent="0">
               <a:buNone/>
             </a:pPr>
             <a:r>
@@ -1175,7 +969,7 @@
           <a:bodyPr wrap="square" lIns="0" tIns="0" rIns="0" bIns="0" rtlCol="0" anchor="ctr"/>
           <a:lstStyle/>
           <a:p>
-            <a:pPr indent="0" marL="0">
+            <a:pPr marL="0" indent="0">
               <a:buNone/>
             </a:pPr>
             <a:r>
@@ -1219,6 +1013,13 @@
             <a:prstDash val="solid"/>
           </a:ln>
         </p:spPr>
+        <p:txBody>
+          <a:bodyPr/>
+          <a:lstStyle/>
+          <a:p>
+            <a:endParaRPr lang="en-US"/>
+          </a:p>
+        </p:txBody>
       </p:sp>
       <p:sp>
         <p:nvSpPr>
@@ -1241,7 +1042,7 @@
           <a:bodyPr wrap="square" lIns="0" tIns="0" rIns="0" bIns="0" rtlCol="0" anchor="ctr"/>
           <a:lstStyle/>
           <a:p>
-            <a:pPr algn="ctr" indent="0" marL="0">
+            <a:pPr marL="0" indent="0" algn="ctr">
               <a:buNone/>
             </a:pPr>
             <a:r>
@@ -1285,6 +1086,13 @@
             <a:prstDash val="solid"/>
           </a:ln>
         </p:spPr>
+        <p:txBody>
+          <a:bodyPr/>
+          <a:lstStyle/>
+          <a:p>
+            <a:endParaRPr lang="en-US"/>
+          </a:p>
+        </p:txBody>
       </p:sp>
       <p:sp>
         <p:nvSpPr>
@@ -1307,7 +1115,7 @@
           <a:bodyPr wrap="square" lIns="0" tIns="0" rIns="0" bIns="0" rtlCol="0" anchor="ctr"/>
           <a:lstStyle/>
           <a:p>
-            <a:pPr algn="ctr" indent="0" marL="0">
+            <a:pPr marL="0" indent="0" algn="ctr">
               <a:buNone/>
             </a:pPr>
             <a:r>
@@ -1351,6 +1159,13 @@
             <a:prstDash val="solid"/>
           </a:ln>
         </p:spPr>
+        <p:txBody>
+          <a:bodyPr/>
+          <a:lstStyle/>
+          <a:p>
+            <a:endParaRPr lang="en-US"/>
+          </a:p>
+        </p:txBody>
       </p:sp>
       <p:sp>
         <p:nvSpPr>
@@ -1373,7 +1188,7 @@
           <a:bodyPr wrap="square" lIns="0" tIns="0" rIns="0" bIns="0" rtlCol="0" anchor="ctr"/>
           <a:lstStyle/>
           <a:p>
-            <a:pPr algn="ctr" indent="0" marL="0">
+            <a:pPr marL="0" indent="0" algn="ctr">
               <a:buNone/>
             </a:pPr>
             <a:r>
@@ -1417,6 +1232,13 @@
             <a:prstDash val="solid"/>
           </a:ln>
         </p:spPr>
+        <p:txBody>
+          <a:bodyPr/>
+          <a:lstStyle/>
+          <a:p>
+            <a:endParaRPr lang="en-US"/>
+          </a:p>
+        </p:txBody>
       </p:sp>
       <p:sp>
         <p:nvSpPr>
@@ -1444,6 +1266,13 @@
             <a:prstDash val="solid"/>
           </a:ln>
         </p:spPr>
+        <p:txBody>
+          <a:bodyPr/>
+          <a:lstStyle/>
+          <a:p>
+            <a:endParaRPr lang="en-US"/>
+          </a:p>
+        </p:txBody>
       </p:sp>
       <p:sp>
         <p:nvSpPr>
@@ -1466,7 +1295,7 @@
           <a:bodyPr wrap="square" lIns="0" tIns="0" rIns="0" bIns="0" rtlCol="0" anchor="ctr"/>
           <a:lstStyle/>
           <a:p>
-            <a:pPr algn="ctr" indent="0" marL="0">
+            <a:pPr marL="0" indent="0" algn="ctr">
               <a:buNone/>
             </a:pPr>
             <a:r>
@@ -1510,6 +1339,13 @@
             <a:prstDash val="solid"/>
           </a:ln>
         </p:spPr>
+        <p:txBody>
+          <a:bodyPr/>
+          <a:lstStyle/>
+          <a:p>
+            <a:endParaRPr lang="en-US"/>
+          </a:p>
+        </p:txBody>
       </p:sp>
       <p:sp>
         <p:nvSpPr>
@@ -1532,7 +1368,7 @@
           <a:bodyPr wrap="square" lIns="0" tIns="0" rIns="0" bIns="0" rtlCol="0" anchor="ctr"/>
           <a:lstStyle/>
           <a:p>
-            <a:pPr algn="ctr" indent="0" marL="0">
+            <a:pPr marL="0" indent="0" algn="ctr">
               <a:buNone/>
             </a:pPr>
             <a:r>
@@ -1576,6 +1412,13 @@
             <a:prstDash val="solid"/>
           </a:ln>
         </p:spPr>
+        <p:txBody>
+          <a:bodyPr/>
+          <a:lstStyle/>
+          <a:p>
+            <a:endParaRPr lang="en-US"/>
+          </a:p>
+        </p:txBody>
       </p:sp>
       <p:sp>
         <p:nvSpPr>
@@ -1598,7 +1441,7 @@
           <a:bodyPr wrap="square" lIns="0" tIns="0" rIns="0" bIns="0" rtlCol="0" anchor="ctr"/>
           <a:lstStyle/>
           <a:p>
-            <a:pPr algn="ctr" indent="0" marL="0">
+            <a:pPr marL="0" indent="0" algn="ctr">
               <a:buNone/>
             </a:pPr>
             <a:r>
@@ -1642,6 +1485,13 @@
             <a:prstDash val="solid"/>
           </a:ln>
         </p:spPr>
+        <p:txBody>
+          <a:bodyPr/>
+          <a:lstStyle/>
+          <a:p>
+            <a:endParaRPr lang="en-US"/>
+          </a:p>
+        </p:txBody>
       </p:sp>
       <p:sp>
         <p:nvSpPr>
@@ -1664,7 +1514,7 @@
           <a:bodyPr wrap="square" lIns="0" tIns="0" rIns="0" bIns="0" rtlCol="0" anchor="ctr"/>
           <a:lstStyle/>
           <a:p>
-            <a:pPr algn="ctr" indent="0" marL="0">
+            <a:pPr marL="0" indent="0" algn="ctr">
               <a:buNone/>
             </a:pPr>
             <a:r>
@@ -1708,6 +1558,13 @@
             <a:prstDash val="solid"/>
           </a:ln>
         </p:spPr>
+        <p:txBody>
+          <a:bodyPr/>
+          <a:lstStyle/>
+          <a:p>
+            <a:endParaRPr lang="en-US"/>
+          </a:p>
+        </p:txBody>
       </p:sp>
       <p:sp>
         <p:nvSpPr>
@@ -1730,7 +1587,7 @@
           <a:bodyPr wrap="square" lIns="0" tIns="0" rIns="0" bIns="0" rtlCol="0" anchor="ctr"/>
           <a:lstStyle/>
           <a:p>
-            <a:pPr algn="ctr" indent="0" marL="0">
+            <a:pPr marL="0" indent="0" algn="ctr">
               <a:buNone/>
             </a:pPr>
             <a:r>
@@ -1774,6 +1631,13 @@
             <a:prstDash val="solid"/>
           </a:ln>
         </p:spPr>
+        <p:txBody>
+          <a:bodyPr/>
+          <a:lstStyle/>
+          <a:p>
+            <a:endParaRPr lang="en-US"/>
+          </a:p>
+        </p:txBody>
       </p:sp>
       <p:sp>
         <p:nvSpPr>
@@ -1796,7 +1660,7 @@
           <a:bodyPr wrap="square" lIns="0" tIns="0" rIns="0" bIns="0" rtlCol="0" anchor="ctr"/>
           <a:lstStyle/>
           <a:p>
-            <a:pPr algn="ctr" indent="0" marL="0">
+            <a:pPr marL="0" indent="0" algn="ctr">
               <a:buNone/>
             </a:pPr>
             <a:r>
@@ -1840,6 +1704,13 @@
             <a:prstDash val="solid"/>
           </a:ln>
         </p:spPr>
+        <p:txBody>
+          <a:bodyPr/>
+          <a:lstStyle/>
+          <a:p>
+            <a:endParaRPr lang="en-US"/>
+          </a:p>
+        </p:txBody>
       </p:sp>
       <p:sp>
         <p:nvSpPr>
@@ -1862,7 +1733,7 @@
           <a:bodyPr wrap="square" lIns="0" tIns="0" rIns="0" bIns="0" rtlCol="0" anchor="ctr"/>
           <a:lstStyle/>
           <a:p>
-            <a:pPr algn="ctr" indent="0" marL="0">
+            <a:pPr marL="0" indent="0" algn="ctr">
               <a:buNone/>
             </a:pPr>
             <a:r>
@@ -1906,6 +1777,13 @@
             <a:prstDash val="solid"/>
           </a:ln>
         </p:spPr>
+        <p:txBody>
+          <a:bodyPr/>
+          <a:lstStyle/>
+          <a:p>
+            <a:endParaRPr lang="en-US"/>
+          </a:p>
+        </p:txBody>
       </p:sp>
       <p:sp>
         <p:nvSpPr>
@@ -1928,7 +1806,7 @@
           <a:bodyPr wrap="square" lIns="0" tIns="0" rIns="0" bIns="0" rtlCol="0" anchor="ctr"/>
           <a:lstStyle/>
           <a:p>
-            <a:pPr algn="ctr" indent="0" marL="0">
+            <a:pPr marL="0" indent="0" algn="ctr">
               <a:buNone/>
             </a:pPr>
             <a:r>
@@ -1972,6 +1850,13 @@
             <a:prstDash val="solid"/>
           </a:ln>
         </p:spPr>
+        <p:txBody>
+          <a:bodyPr/>
+          <a:lstStyle/>
+          <a:p>
+            <a:endParaRPr lang="en-US"/>
+          </a:p>
+        </p:txBody>
       </p:sp>
       <p:sp>
         <p:nvSpPr>
@@ -1994,7 +1879,7 @@
           <a:bodyPr wrap="square" lIns="0" tIns="0" rIns="0" bIns="0" rtlCol="0" anchor="ctr"/>
           <a:lstStyle/>
           <a:p>
-            <a:pPr algn="ctr" indent="0" marL="0">
+            <a:pPr marL="0" indent="0" algn="ctr">
               <a:buNone/>
             </a:pPr>
             <a:r>
@@ -2038,6 +1923,13 @@
             <a:prstDash val="solid"/>
           </a:ln>
         </p:spPr>
+        <p:txBody>
+          <a:bodyPr/>
+          <a:lstStyle/>
+          <a:p>
+            <a:endParaRPr lang="en-US"/>
+          </a:p>
+        </p:txBody>
       </p:sp>
       <p:sp>
         <p:nvSpPr>
@@ -2060,7 +1952,7 @@
           <a:bodyPr wrap="square" lIns="0" tIns="0" rIns="0" bIns="0" rtlCol="0" anchor="ctr"/>
           <a:lstStyle/>
           <a:p>
-            <a:pPr algn="ctr" indent="0" marL="0">
+            <a:pPr marL="0" indent="0" algn="ctr">
               <a:buNone/>
             </a:pPr>
             <a:r>
@@ -2104,6 +1996,13 @@
             <a:prstDash val="solid"/>
           </a:ln>
         </p:spPr>
+        <p:txBody>
+          <a:bodyPr/>
+          <a:lstStyle/>
+          <a:p>
+            <a:endParaRPr lang="en-US"/>
+          </a:p>
+        </p:txBody>
       </p:sp>
       <p:sp>
         <p:nvSpPr>
@@ -2126,7 +2025,7 @@
           <a:bodyPr wrap="square" lIns="0" tIns="0" rIns="0" bIns="0" rtlCol="0" anchor="ctr"/>
           <a:lstStyle/>
           <a:p>
-            <a:pPr algn="ctr" indent="0" marL="0">
+            <a:pPr marL="0" indent="0" algn="ctr">
               <a:buNone/>
             </a:pPr>
             <a:r>
@@ -2170,6 +2069,13 @@
             <a:prstDash val="solid"/>
           </a:ln>
         </p:spPr>
+        <p:txBody>
+          <a:bodyPr/>
+          <a:lstStyle/>
+          <a:p>
+            <a:endParaRPr lang="en-US"/>
+          </a:p>
+        </p:txBody>
       </p:sp>
       <p:sp>
         <p:nvSpPr>
@@ -2192,7 +2098,7 @@
           <a:bodyPr wrap="square" lIns="0" tIns="0" rIns="0" bIns="0" rtlCol="0" anchor="ctr"/>
           <a:lstStyle/>
           <a:p>
-            <a:pPr algn="ctr" indent="0" marL="0">
+            <a:pPr marL="0" indent="0" algn="ctr">
               <a:buNone/>
             </a:pPr>
             <a:r>
@@ -2236,24 +2142,31 @@
             <a:prstDash val="solid"/>
           </a:ln>
           <a:effectLst>
-            <a:outerShdw sx="100000" sy="100000" kx="0" ky="0" algn="bl" rotWithShape="0" blurRad="101600" dist="25400" dir="8100000">
+            <a:outerShdw blurRad="101600" dist="25400" dir="8100000" algn="bl" rotWithShape="0">
               <a:srgbClr val="000000">
                 <a:alpha val="10000"/>
               </a:srgbClr>
             </a:outerShdw>
           </a:effectLst>
         </p:spPr>
+        <p:txBody>
+          <a:bodyPr/>
+          <a:lstStyle/>
+          <a:p>
+            <a:endParaRPr lang="en-US"/>
+          </a:p>
+        </p:txBody>
       </p:sp>
       <p:pic>
         <p:nvPicPr>
-          <p:cNvPr id="43" name="Image 2" descr="preencoded.png">    </p:cNvPr>
+          <p:cNvPr id="43" name="Image 2" descr="preencoded.png"/>
           <p:cNvPicPr>
             <a:picLocks noChangeAspect="1"/>
           </p:cNvPicPr>
           <p:nvPr/>
         </p:nvPicPr>
         <p:blipFill>
-          <a:blip r:embed="rId3"/>
+          <a:blip r:embed="rId5"/>
           <a:stretch>
             <a:fillRect/>
           </a:stretch>
@@ -2289,7 +2202,7 @@
           <a:bodyPr wrap="square" lIns="0" tIns="0" rIns="0" bIns="0" rtlCol="0" anchor="ctr"/>
           <a:lstStyle/>
           <a:p>
-            <a:pPr indent="0" marL="0">
+            <a:pPr marL="0" indent="0">
               <a:buNone/>
             </a:pPr>
             <a:r>
@@ -2328,7 +2241,7 @@
           <a:bodyPr wrap="square" lIns="0" tIns="0" rIns="0" bIns="0" rtlCol="0" anchor="ctr"/>
           <a:lstStyle/>
           <a:p>
-            <a:pPr indent="0" marL="0">
+            <a:pPr marL="0" indent="0">
               <a:buNone/>
             </a:pPr>
             <a:r>
@@ -2372,6 +2285,13 @@
             <a:prstDash val="solid"/>
           </a:ln>
         </p:spPr>
+        <p:txBody>
+          <a:bodyPr/>
+          <a:lstStyle/>
+          <a:p>
+            <a:endParaRPr lang="en-US"/>
+          </a:p>
+        </p:txBody>
       </p:sp>
       <p:sp>
         <p:nvSpPr>
@@ -2394,7 +2314,7 @@
           <a:bodyPr wrap="square" lIns="0" tIns="0" rIns="0" bIns="0" rtlCol="0" anchor="ctr"/>
           <a:lstStyle/>
           <a:p>
-            <a:pPr indent="0" marL="0">
+            <a:pPr marL="0" indent="0">
               <a:buNone/>
             </a:pPr>
             <a:r>
@@ -2411,7 +2331,7 @@
             <a:endParaRPr lang="en-US" sz="750" dirty="0"/>
           </a:p>
           <a:p>
-            <a:pPr indent="0" marL="0">
+            <a:pPr marL="0" indent="0">
               <a:buNone/>
             </a:pPr>
             <a:r>
@@ -2455,6 +2375,13 @@
             <a:prstDash val="solid"/>
           </a:ln>
         </p:spPr>
+        <p:txBody>
+          <a:bodyPr/>
+          <a:lstStyle/>
+          <a:p>
+            <a:endParaRPr lang="en-US"/>
+          </a:p>
+        </p:txBody>
       </p:sp>
       <p:sp>
         <p:nvSpPr>
@@ -2477,7 +2404,7 @@
           <a:bodyPr wrap="square" lIns="0" tIns="0" rIns="0" bIns="0" rtlCol="0" anchor="ctr"/>
           <a:lstStyle/>
           <a:p>
-            <a:pPr indent="0" marL="0">
+            <a:pPr marL="0" indent="0">
               <a:buNone/>
             </a:pPr>
             <a:r>
@@ -2494,7 +2421,7 @@
             <a:endParaRPr lang="en-US" sz="750" dirty="0"/>
           </a:p>
           <a:p>
-            <a:pPr indent="0" marL="0">
+            <a:pPr marL="0" indent="0">
               <a:buNone/>
             </a:pPr>
             <a:r>
@@ -2538,6 +2465,13 @@
             <a:prstDash val="solid"/>
           </a:ln>
         </p:spPr>
+        <p:txBody>
+          <a:bodyPr/>
+          <a:lstStyle/>
+          <a:p>
+            <a:endParaRPr lang="en-US"/>
+          </a:p>
+        </p:txBody>
       </p:sp>
       <p:sp>
         <p:nvSpPr>
@@ -2560,7 +2494,7 @@
           <a:bodyPr wrap="square" lIns="0" tIns="0" rIns="0" bIns="0" rtlCol="0" anchor="ctr"/>
           <a:lstStyle/>
           <a:p>
-            <a:pPr indent="0" marL="0">
+            <a:pPr marL="0" indent="0">
               <a:buNone/>
             </a:pPr>
             <a:r>
@@ -2577,7 +2511,7 @@
             <a:endParaRPr lang="en-US" sz="750" dirty="0"/>
           </a:p>
           <a:p>
-            <a:pPr indent="0" marL="0">
+            <a:pPr marL="0" indent="0">
               <a:buNone/>
             </a:pPr>
             <a:r>
@@ -2621,13 +2555,20 @@
             <a:prstDash val="solid"/>
           </a:ln>
           <a:effectLst>
-            <a:outerShdw sx="100000" sy="100000" kx="0" ky="0" algn="bl" rotWithShape="0" blurRad="101600" dist="25400" dir="8100000">
+            <a:outerShdw blurRad="101600" dist="25400" dir="8100000" algn="bl" rotWithShape="0">
               <a:srgbClr val="000000">
                 <a:alpha val="10000"/>
               </a:srgbClr>
             </a:outerShdw>
           </a:effectLst>
         </p:spPr>
+        <p:txBody>
+          <a:bodyPr/>
+          <a:lstStyle/>
+          <a:p>
+            <a:endParaRPr lang="en-US"/>
+          </a:p>
+        </p:txBody>
       </p:sp>
       <p:sp>
         <p:nvSpPr>
@@ -2650,7 +2591,7 @@
           <a:bodyPr wrap="square" lIns="0" tIns="0" rIns="0" bIns="0" rtlCol="0" anchor="ctr"/>
           <a:lstStyle/>
           <a:p>
-            <a:pPr indent="0" marL="0">
+            <a:pPr marL="0" indent="0">
               <a:buNone/>
             </a:pPr>
             <a:r>
@@ -2689,7 +2630,7 @@
           <a:bodyPr wrap="square" lIns="0" tIns="0" rIns="0" bIns="0" rtlCol="0" anchor="ctr"/>
           <a:lstStyle/>
           <a:p>
-            <a:pPr indent="0" marL="0">
+            <a:pPr marL="0" indent="0">
               <a:buNone/>
             </a:pPr>
             <a:r>
@@ -2733,224 +2674,17 @@
             <a:prstDash val="solid"/>
           </a:ln>
         </p:spPr>
+        <p:txBody>
+          <a:bodyPr/>
+          <a:lstStyle/>
+          <a:p>
+            <a:endParaRPr lang="en-US"/>
+          </a:p>
+        </p:txBody>
       </p:sp>
       <p:pic>
         <p:nvPicPr>
-          <p:cNvPr id="56" name="Image 3" descr="preencoded.png">    </p:cNvPr>
-          <p:cNvPicPr>
-            <a:picLocks noChangeAspect="1"/>
-          </p:cNvPicPr>
-          <p:nvPr/>
-        </p:nvPicPr>
-        <p:blipFill>
-          <a:blip r:embed="rId4"/>
-          <a:stretch>
-            <a:fillRect/>
-          </a:stretch>
-        </p:blipFill>
-        <p:spPr>
-          <a:xfrm>
-            <a:off x="9336024" y="3232404"/>
-            <a:ext cx="173736" cy="173736"/>
-          </a:xfrm>
-          <a:prstGeom prst="rect">
-            <a:avLst/>
-          </a:prstGeom>
-        </p:spPr>
-      </p:pic>
-      <p:sp>
-        <p:nvSpPr>
-          <p:cNvPr id="57" name="Text 51"/>
-          <p:cNvSpPr/>
-          <p:nvPr/>
-        </p:nvSpPr>
-        <p:spPr>
-          <a:xfrm>
-            <a:off x="9592056" y="3108960"/>
-            <a:ext cx="2084832" cy="420624"/>
-          </a:xfrm>
-          <a:prstGeom prst="rect">
-            <a:avLst/>
-          </a:prstGeom>
-          <a:noFill/>
-          <a:ln/>
-        </p:spPr>
-        <p:txBody>
-          <a:bodyPr wrap="square" lIns="0" tIns="0" rIns="0" bIns="0" rtlCol="0" anchor="ctr"/>
-          <a:lstStyle/>
-          <a:p>
-            <a:pPr indent="0" marL="0">
-              <a:buNone/>
-            </a:pPr>
-            <a:r>
-              <a:rPr lang="en-US" sz="800" b="1" dirty="0">
-                <a:solidFill>
-                  <a:srgbClr val="16233F"/>
-                </a:solidFill>
-                <a:latin typeface="Calibri" pitchFamily="34" charset="0"/>
-                <a:ea typeface="Calibri" pitchFamily="34" charset="-122"/>
-                <a:cs typeface="Calibri" pitchFamily="34" charset="-120"/>
-              </a:rPr>
-              <a:t>Feeds &amp; newsletters</a:t>
-            </a:r>
-            <a:endParaRPr lang="en-US" sz="800" dirty="0"/>
-          </a:p>
-          <a:p>
-            <a:pPr indent="0" marL="0">
-              <a:buNone/>
-            </a:pPr>
-            <a:r>
-              <a:rPr lang="en-US" sz="650" dirty="0">
-                <a:solidFill>
-                  <a:srgbClr val="6B7A92"/>
-                </a:solidFill>
-                <a:latin typeface="Calibri" pitchFamily="34" charset="0"/>
-                <a:ea typeface="Calibri" pitchFamily="34" charset="-122"/>
-                <a:cs typeface="Calibri" pitchFamily="34" charset="-120"/>
-              </a:rPr>
-              <a:t>RSS/Atom, release notes</a:t>
-            </a:r>
-            <a:endParaRPr lang="en-US" sz="800" dirty="0"/>
-          </a:p>
-        </p:txBody>
-      </p:sp>
-      <p:sp>
-        <p:nvSpPr>
-          <p:cNvPr id="58" name="Shape 52"/>
-          <p:cNvSpPr/>
-          <p:nvPr/>
-        </p:nvSpPr>
-        <p:spPr>
-          <a:xfrm>
-            <a:off x="9226296" y="3593592"/>
-            <a:ext cx="2468880" cy="420624"/>
-          </a:xfrm>
-          <a:prstGeom prst="roundRect">
-            <a:avLst>
-              <a:gd name="adj" fmla="val 8696"/>
-            </a:avLst>
-          </a:prstGeom>
-          <a:solidFill>
-            <a:srgbClr val="EFF8FA"/>
-          </a:solidFill>
-          <a:ln w="9525">
-            <a:solidFill>
-              <a:srgbClr val="C6E3E9"/>
-            </a:solidFill>
-            <a:prstDash val="solid"/>
-          </a:ln>
-        </p:spPr>
-      </p:sp>
-      <p:pic>
-        <p:nvPicPr>
-          <p:cNvPr id="59" name="Image 4" descr="preencoded.png">    </p:cNvPr>
-          <p:cNvPicPr>
-            <a:picLocks noChangeAspect="1"/>
-          </p:cNvPicPr>
-          <p:nvPr/>
-        </p:nvPicPr>
-        <p:blipFill>
-          <a:blip r:embed="rId5"/>
-          <a:stretch>
-            <a:fillRect/>
-          </a:stretch>
-        </p:blipFill>
-        <p:spPr>
-          <a:xfrm>
-            <a:off x="9336024" y="3717036"/>
-            <a:ext cx="173736" cy="173736"/>
-          </a:xfrm>
-          <a:prstGeom prst="rect">
-            <a:avLst/>
-          </a:prstGeom>
-        </p:spPr>
-      </p:pic>
-      <p:sp>
-        <p:nvSpPr>
-          <p:cNvPr id="60" name="Text 53"/>
-          <p:cNvSpPr/>
-          <p:nvPr/>
-        </p:nvSpPr>
-        <p:spPr>
-          <a:xfrm>
-            <a:off x="9592056" y="3593592"/>
-            <a:ext cx="2084832" cy="420624"/>
-          </a:xfrm>
-          <a:prstGeom prst="rect">
-            <a:avLst/>
-          </a:prstGeom>
-          <a:noFill/>
-          <a:ln/>
-        </p:spPr>
-        <p:txBody>
-          <a:bodyPr wrap="square" lIns="0" tIns="0" rIns="0" bIns="0" rtlCol="0" anchor="ctr"/>
-          <a:lstStyle/>
-          <a:p>
-            <a:pPr indent="0" marL="0">
-              <a:buNone/>
-            </a:pPr>
-            <a:r>
-              <a:rPr lang="en-US" sz="800" b="1" dirty="0">
-                <a:solidFill>
-                  <a:srgbClr val="16233F"/>
-                </a:solidFill>
-                <a:latin typeface="Calibri" pitchFamily="34" charset="0"/>
-                <a:ea typeface="Calibri" pitchFamily="34" charset="-122"/>
-                <a:cs typeface="Calibri" pitchFamily="34" charset="-120"/>
-              </a:rPr>
-              <a:t>Conferences &amp; events</a:t>
-            </a:r>
-            <a:endParaRPr lang="en-US" sz="800" dirty="0"/>
-          </a:p>
-          <a:p>
-            <a:pPr indent="0" marL="0">
-              <a:buNone/>
-            </a:pPr>
-            <a:r>
-              <a:rPr lang="en-US" sz="650" dirty="0">
-                <a:solidFill>
-                  <a:srgbClr val="6B7A92"/>
-                </a:solidFill>
-                <a:latin typeface="Calibri" pitchFamily="34" charset="0"/>
-                <a:ea typeface="Calibri" pitchFamily="34" charset="-122"/>
-                <a:cs typeface="Calibri" pitchFamily="34" charset="-120"/>
-              </a:rPr>
-              <a:t>catalogs, slides, proceedings</a:t>
-            </a:r>
-            <a:endParaRPr lang="en-US" sz="800" dirty="0"/>
-          </a:p>
-        </p:txBody>
-      </p:sp>
-      <p:sp>
-        <p:nvSpPr>
-          <p:cNvPr id="61" name="Shape 54"/>
-          <p:cNvSpPr/>
-          <p:nvPr/>
-        </p:nvSpPr>
-        <p:spPr>
-          <a:xfrm>
-            <a:off x="9226296" y="4078224"/>
-            <a:ext cx="2468880" cy="420624"/>
-          </a:xfrm>
-          <a:prstGeom prst="roundRect">
-            <a:avLst>
-              <a:gd name="adj" fmla="val 8696"/>
-            </a:avLst>
-          </a:prstGeom>
-          <a:solidFill>
-            <a:srgbClr val="EFF8FA"/>
-          </a:solidFill>
-          <a:ln w="9525">
-            <a:solidFill>
-              <a:srgbClr val="C6E3E9"/>
-            </a:solidFill>
-            <a:prstDash val="solid"/>
-          </a:ln>
-        </p:spPr>
-      </p:sp>
-      <p:pic>
-        <p:nvPicPr>
-          <p:cNvPr id="62" name="Image 5" descr="preencoded.png">    </p:cNvPr>
+          <p:cNvPr id="56" name="Image 3" descr="preencoded.png"/>
           <p:cNvPicPr>
             <a:picLocks noChangeAspect="1"/>
           </p:cNvPicPr>
@@ -2964,7 +2698,7 @@
         </p:blipFill>
         <p:spPr>
           <a:xfrm>
-            <a:off x="9336024" y="4201668"/>
+            <a:off x="9336024" y="3232404"/>
             <a:ext cx="173736" cy="173736"/>
           </a:xfrm>
           <a:prstGeom prst="rect">
@@ -2974,13 +2708,13 @@
       </p:pic>
       <p:sp>
         <p:nvSpPr>
-          <p:cNvPr id="63" name="Text 55"/>
-          <p:cNvSpPr/>
-          <p:nvPr/>
-        </p:nvSpPr>
-        <p:spPr>
-          <a:xfrm>
-            <a:off x="9592056" y="4078224"/>
+          <p:cNvPr id="57" name="Text 51"/>
+          <p:cNvSpPr/>
+          <p:nvPr/>
+        </p:nvSpPr>
+        <p:spPr>
+          <a:xfrm>
+            <a:off x="9592056" y="3108960"/>
             <a:ext cx="2084832" cy="420624"/>
           </a:xfrm>
           <a:prstGeom prst="rect">
@@ -2993,7 +2727,7 @@
           <a:bodyPr wrap="square" lIns="0" tIns="0" rIns="0" bIns="0" rtlCol="0" anchor="ctr"/>
           <a:lstStyle/>
           <a:p>
-            <a:pPr indent="0" marL="0">
+            <a:pPr marL="0" indent="0">
               <a:buNone/>
             </a:pPr>
             <a:r>
@@ -3005,12 +2739,12 @@
                 <a:ea typeface="Calibri" pitchFamily="34" charset="-122"/>
                 <a:cs typeface="Calibri" pitchFamily="34" charset="-120"/>
               </a:rPr>
-              <a:t>Meetings &amp; talks</a:t>
+              <a:t>Feeds &amp; newsletters</a:t>
             </a:r>
             <a:endParaRPr lang="en-US" sz="800" dirty="0"/>
           </a:p>
           <a:p>
-            <a:pPr indent="0" marL="0">
+            <a:pPr marL="0" indent="0">
               <a:buNone/>
             </a:pPr>
             <a:r>
@@ -3022,7 +2756,7 @@
                 <a:ea typeface="Calibri" pitchFamily="34" charset="-122"/>
                 <a:cs typeface="Calibri" pitchFamily="34" charset="-120"/>
               </a:rPr>
-              <a:t>transcripts, recordings</a:t>
+              <a:t>RSS/Atom, release notes</a:t>
             </a:r>
             <a:endParaRPr lang="en-US" sz="800" dirty="0"/>
           </a:p>
@@ -3030,13 +2764,13 @@
       </p:sp>
       <p:sp>
         <p:nvSpPr>
-          <p:cNvPr id="64" name="Shape 56"/>
-          <p:cNvSpPr/>
-          <p:nvPr/>
-        </p:nvSpPr>
-        <p:spPr>
-          <a:xfrm>
-            <a:off x="9226296" y="4562856"/>
+          <p:cNvPr id="58" name="Shape 52"/>
+          <p:cNvSpPr/>
+          <p:nvPr/>
+        </p:nvSpPr>
+        <p:spPr>
+          <a:xfrm>
+            <a:off x="9226296" y="3593592"/>
             <a:ext cx="2468880" cy="420624"/>
           </a:xfrm>
           <a:prstGeom prst="roundRect">
@@ -3054,10 +2788,17 @@
             <a:prstDash val="solid"/>
           </a:ln>
         </p:spPr>
+        <p:txBody>
+          <a:bodyPr/>
+          <a:lstStyle/>
+          <a:p>
+            <a:endParaRPr lang="en-US"/>
+          </a:p>
+        </p:txBody>
       </p:sp>
       <p:pic>
         <p:nvPicPr>
-          <p:cNvPr id="65" name="Image 6" descr="preencoded.png">    </p:cNvPr>
+          <p:cNvPr id="59" name="Image 4" descr="preencoded.png"/>
           <p:cNvPicPr>
             <a:picLocks noChangeAspect="1"/>
           </p:cNvPicPr>
@@ -3071,7 +2812,7 @@
         </p:blipFill>
         <p:spPr>
           <a:xfrm>
-            <a:off x="9336024" y="4686300"/>
+            <a:off x="9336024" y="3717036"/>
             <a:ext cx="173736" cy="173736"/>
           </a:xfrm>
           <a:prstGeom prst="rect">
@@ -3081,13 +2822,13 @@
       </p:pic>
       <p:sp>
         <p:nvSpPr>
-          <p:cNvPr id="66" name="Text 57"/>
-          <p:cNvSpPr/>
-          <p:nvPr/>
-        </p:nvSpPr>
-        <p:spPr>
-          <a:xfrm>
-            <a:off x="9592056" y="4562856"/>
+          <p:cNvPr id="60" name="Text 53"/>
+          <p:cNvSpPr/>
+          <p:nvPr/>
+        </p:nvSpPr>
+        <p:spPr>
+          <a:xfrm>
+            <a:off x="9592056" y="3593592"/>
             <a:ext cx="2084832" cy="420624"/>
           </a:xfrm>
           <a:prstGeom prst="rect">
@@ -3100,7 +2841,7 @@
           <a:bodyPr wrap="square" lIns="0" tIns="0" rIns="0" bIns="0" rtlCol="0" anchor="ctr"/>
           <a:lstStyle/>
           <a:p>
-            <a:pPr indent="0" marL="0">
+            <a:pPr marL="0" indent="0">
               <a:buNone/>
             </a:pPr>
             <a:r>
@@ -3112,12 +2853,12 @@
                 <a:ea typeface="Calibri" pitchFamily="34" charset="-122"/>
                 <a:cs typeface="Calibri" pitchFamily="34" charset="-120"/>
               </a:rPr>
-              <a:t>Papers, reports, vendor docs</a:t>
+              <a:t>Conferences &amp; events</a:t>
             </a:r>
             <a:endParaRPr lang="en-US" sz="800" dirty="0"/>
           </a:p>
           <a:p>
-            <a:pPr indent="0" marL="0">
+            <a:pPr marL="0" indent="0">
               <a:buNone/>
             </a:pPr>
             <a:r>
@@ -3129,7 +2870,7 @@
                 <a:ea typeface="Calibri" pitchFamily="34" charset="-122"/>
                 <a:cs typeface="Calibri" pitchFamily="34" charset="-120"/>
               </a:rPr>
-              <a:t>authoritative deep sources</a:t>
+              <a:t>catalogs, slides, proceedings</a:t>
             </a:r>
             <a:endParaRPr lang="en-US" sz="800" dirty="0"/>
           </a:p>
@@ -3137,13 +2878,13 @@
       </p:sp>
       <p:sp>
         <p:nvSpPr>
-          <p:cNvPr id="67" name="Shape 58"/>
-          <p:cNvSpPr/>
-          <p:nvPr/>
-        </p:nvSpPr>
-        <p:spPr>
-          <a:xfrm>
-            <a:off x="9226296" y="5047488"/>
+          <p:cNvPr id="61" name="Shape 54"/>
+          <p:cNvSpPr/>
+          <p:nvPr/>
+        </p:nvSpPr>
+        <p:spPr>
+          <a:xfrm>
+            <a:off x="9226296" y="4078224"/>
             <a:ext cx="2468880" cy="420624"/>
           </a:xfrm>
           <a:prstGeom prst="roundRect">
@@ -3161,10 +2902,17 @@
             <a:prstDash val="solid"/>
           </a:ln>
         </p:spPr>
+        <p:txBody>
+          <a:bodyPr/>
+          <a:lstStyle/>
+          <a:p>
+            <a:endParaRPr lang="en-US"/>
+          </a:p>
+        </p:txBody>
       </p:sp>
       <p:pic>
         <p:nvPicPr>
-          <p:cNvPr id="68" name="Image 7" descr="preencoded.png">    </p:cNvPr>
+          <p:cNvPr id="62" name="Image 5" descr="preencoded.png"/>
           <p:cNvPicPr>
             <a:picLocks noChangeAspect="1"/>
           </p:cNvPicPr>
@@ -3178,6 +2926,234 @@
         </p:blipFill>
         <p:spPr>
           <a:xfrm>
+            <a:off x="9336024" y="4201668"/>
+            <a:ext cx="173736" cy="173736"/>
+          </a:xfrm>
+          <a:prstGeom prst="rect">
+            <a:avLst/>
+          </a:prstGeom>
+        </p:spPr>
+      </p:pic>
+      <p:sp>
+        <p:nvSpPr>
+          <p:cNvPr id="63" name="Text 55"/>
+          <p:cNvSpPr/>
+          <p:nvPr/>
+        </p:nvSpPr>
+        <p:spPr>
+          <a:xfrm>
+            <a:off x="9592056" y="4078224"/>
+            <a:ext cx="2084832" cy="420624"/>
+          </a:xfrm>
+          <a:prstGeom prst="rect">
+            <a:avLst/>
+          </a:prstGeom>
+          <a:noFill/>
+          <a:ln/>
+        </p:spPr>
+        <p:txBody>
+          <a:bodyPr wrap="square" lIns="0" tIns="0" rIns="0" bIns="0" rtlCol="0" anchor="ctr"/>
+          <a:lstStyle/>
+          <a:p>
+            <a:pPr marL="0" indent="0">
+              <a:buNone/>
+            </a:pPr>
+            <a:r>
+              <a:rPr lang="en-US" sz="800" b="1" dirty="0">
+                <a:solidFill>
+                  <a:srgbClr val="16233F"/>
+                </a:solidFill>
+                <a:latin typeface="Calibri" pitchFamily="34" charset="0"/>
+                <a:ea typeface="Calibri" pitchFamily="34" charset="-122"/>
+                <a:cs typeface="Calibri" pitchFamily="34" charset="-120"/>
+              </a:rPr>
+              <a:t>Meetings &amp; talks</a:t>
+            </a:r>
+            <a:endParaRPr lang="en-US" sz="800" dirty="0"/>
+          </a:p>
+          <a:p>
+            <a:pPr marL="0" indent="0">
+              <a:buNone/>
+            </a:pPr>
+            <a:r>
+              <a:rPr lang="en-US" sz="650" dirty="0">
+                <a:solidFill>
+                  <a:srgbClr val="6B7A92"/>
+                </a:solidFill>
+                <a:latin typeface="Calibri" pitchFamily="34" charset="0"/>
+                <a:ea typeface="Calibri" pitchFamily="34" charset="-122"/>
+                <a:cs typeface="Calibri" pitchFamily="34" charset="-120"/>
+              </a:rPr>
+              <a:t>transcripts, recordings</a:t>
+            </a:r>
+            <a:endParaRPr lang="en-US" sz="800" dirty="0"/>
+          </a:p>
+        </p:txBody>
+      </p:sp>
+      <p:sp>
+        <p:nvSpPr>
+          <p:cNvPr id="64" name="Shape 56"/>
+          <p:cNvSpPr/>
+          <p:nvPr/>
+        </p:nvSpPr>
+        <p:spPr>
+          <a:xfrm>
+            <a:off x="9226296" y="4562856"/>
+            <a:ext cx="2468880" cy="420624"/>
+          </a:xfrm>
+          <a:prstGeom prst="roundRect">
+            <a:avLst>
+              <a:gd name="adj" fmla="val 8696"/>
+            </a:avLst>
+          </a:prstGeom>
+          <a:solidFill>
+            <a:srgbClr val="EFF8FA"/>
+          </a:solidFill>
+          <a:ln w="9525">
+            <a:solidFill>
+              <a:srgbClr val="C6E3E9"/>
+            </a:solidFill>
+            <a:prstDash val="solid"/>
+          </a:ln>
+        </p:spPr>
+        <p:txBody>
+          <a:bodyPr/>
+          <a:lstStyle/>
+          <a:p>
+            <a:endParaRPr lang="en-US"/>
+          </a:p>
+        </p:txBody>
+      </p:sp>
+      <p:pic>
+        <p:nvPicPr>
+          <p:cNvPr id="65" name="Image 6" descr="preencoded.png"/>
+          <p:cNvPicPr>
+            <a:picLocks noChangeAspect="1"/>
+          </p:cNvPicPr>
+          <p:nvPr/>
+        </p:nvPicPr>
+        <p:blipFill>
+          <a:blip r:embed="rId9"/>
+          <a:stretch>
+            <a:fillRect/>
+          </a:stretch>
+        </p:blipFill>
+        <p:spPr>
+          <a:xfrm>
+            <a:off x="9336024" y="4686300"/>
+            <a:ext cx="173736" cy="173736"/>
+          </a:xfrm>
+          <a:prstGeom prst="rect">
+            <a:avLst/>
+          </a:prstGeom>
+        </p:spPr>
+      </p:pic>
+      <p:sp>
+        <p:nvSpPr>
+          <p:cNvPr id="66" name="Text 57"/>
+          <p:cNvSpPr/>
+          <p:nvPr/>
+        </p:nvSpPr>
+        <p:spPr>
+          <a:xfrm>
+            <a:off x="9592056" y="4562856"/>
+            <a:ext cx="2084832" cy="420624"/>
+          </a:xfrm>
+          <a:prstGeom prst="rect">
+            <a:avLst/>
+          </a:prstGeom>
+          <a:noFill/>
+          <a:ln/>
+        </p:spPr>
+        <p:txBody>
+          <a:bodyPr wrap="square" lIns="0" tIns="0" rIns="0" bIns="0" rtlCol="0" anchor="ctr"/>
+          <a:lstStyle/>
+          <a:p>
+            <a:pPr marL="0" indent="0">
+              <a:buNone/>
+            </a:pPr>
+            <a:r>
+              <a:rPr lang="en-US" sz="800" b="1" dirty="0">
+                <a:solidFill>
+                  <a:srgbClr val="16233F"/>
+                </a:solidFill>
+                <a:latin typeface="Calibri" pitchFamily="34" charset="0"/>
+                <a:ea typeface="Calibri" pitchFamily="34" charset="-122"/>
+                <a:cs typeface="Calibri" pitchFamily="34" charset="-120"/>
+              </a:rPr>
+              <a:t>Papers, reports, vendor docs</a:t>
+            </a:r>
+            <a:endParaRPr lang="en-US" sz="800" dirty="0"/>
+          </a:p>
+          <a:p>
+            <a:pPr marL="0" indent="0">
+              <a:buNone/>
+            </a:pPr>
+            <a:r>
+              <a:rPr lang="en-US" sz="650" dirty="0">
+                <a:solidFill>
+                  <a:srgbClr val="6B7A92"/>
+                </a:solidFill>
+                <a:latin typeface="Calibri" pitchFamily="34" charset="0"/>
+                <a:ea typeface="Calibri" pitchFamily="34" charset="-122"/>
+                <a:cs typeface="Calibri" pitchFamily="34" charset="-120"/>
+              </a:rPr>
+              <a:t>authoritative deep sources</a:t>
+            </a:r>
+            <a:endParaRPr lang="en-US" sz="800" dirty="0"/>
+          </a:p>
+        </p:txBody>
+      </p:sp>
+      <p:sp>
+        <p:nvSpPr>
+          <p:cNvPr id="67" name="Shape 58"/>
+          <p:cNvSpPr/>
+          <p:nvPr/>
+        </p:nvSpPr>
+        <p:spPr>
+          <a:xfrm>
+            <a:off x="9226296" y="5047488"/>
+            <a:ext cx="2468880" cy="420624"/>
+          </a:xfrm>
+          <a:prstGeom prst="roundRect">
+            <a:avLst>
+              <a:gd name="adj" fmla="val 8696"/>
+            </a:avLst>
+          </a:prstGeom>
+          <a:solidFill>
+            <a:srgbClr val="EFF8FA"/>
+          </a:solidFill>
+          <a:ln w="9525">
+            <a:solidFill>
+              <a:srgbClr val="C6E3E9"/>
+            </a:solidFill>
+            <a:prstDash val="solid"/>
+          </a:ln>
+        </p:spPr>
+        <p:txBody>
+          <a:bodyPr/>
+          <a:lstStyle/>
+          <a:p>
+            <a:endParaRPr lang="en-US"/>
+          </a:p>
+        </p:txBody>
+      </p:sp>
+      <p:pic>
+        <p:nvPicPr>
+          <p:cNvPr id="68" name="Image 7" descr="preencoded.png"/>
+          <p:cNvPicPr>
+            <a:picLocks noChangeAspect="1"/>
+          </p:cNvPicPr>
+          <p:nvPr/>
+        </p:nvPicPr>
+        <p:blipFill>
+          <a:blip r:embed="rId10"/>
+          <a:stretch>
+            <a:fillRect/>
+          </a:stretch>
+        </p:blipFill>
+        <p:spPr>
+          <a:xfrm>
             <a:off x="9336024" y="5170932"/>
             <a:ext cx="173736" cy="173736"/>
           </a:xfrm>
@@ -3207,7 +3183,7 @@
           <a:bodyPr wrap="square" lIns="0" tIns="0" rIns="0" bIns="0" rtlCol="0" anchor="ctr"/>
           <a:lstStyle/>
           <a:p>
-            <a:pPr indent="0" marL="0">
+            <a:pPr marL="0" indent="0">
               <a:buNone/>
             </a:pPr>
             <a:r>
@@ -3224,7 +3200,7 @@
             <a:endParaRPr lang="en-US" sz="800" dirty="0"/>
           </a:p>
           <a:p>
-            <a:pPr indent="0" marL="0">
+            <a:pPr marL="0" indent="0">
               <a:buNone/>
             </a:pPr>
             <a:r>
@@ -3268,13 +3244,20 @@
             <a:prstDash val="solid"/>
           </a:ln>
           <a:effectLst>
-            <a:outerShdw sx="100000" sy="100000" kx="0" ky="0" algn="bl" rotWithShape="0" blurRad="63500" dist="12700" dir="8100000">
+            <a:outerShdw blurRad="63500" dist="12700" dir="8100000" algn="bl" rotWithShape="0">
               <a:srgbClr val="000000">
                 <a:alpha val="7000"/>
               </a:srgbClr>
             </a:outerShdw>
           </a:effectLst>
         </p:spPr>
+        <p:txBody>
+          <a:bodyPr/>
+          <a:lstStyle/>
+          <a:p>
+            <a:endParaRPr lang="en-US"/>
+          </a:p>
+        </p:txBody>
       </p:sp>
       <p:sp>
         <p:nvSpPr>
@@ -3297,11 +3280,11 @@
           <a:bodyPr wrap="square" lIns="0" tIns="0" rIns="0" bIns="0" rtlCol="0" anchor="ctr"/>
           <a:lstStyle/>
           <a:p>
-            <a:pPr indent="0" marL="0">
+            <a:pPr marL="0" indent="0">
               <a:buNone/>
             </a:pPr>
             <a:r>
-              <a:rPr lang="en-US" sz="800" b="1" spc="100" kern="0" dirty="0">
+              <a:rPr lang="en-US" sz="800" b="1" kern="0" spc="100" dirty="0">
                 <a:solidFill>
                   <a:srgbClr val="6B7A92"/>
                 </a:solidFill>
@@ -3339,6 +3322,13 @@
             <a:prstDash val="solid"/>
           </a:ln>
         </p:spPr>
+        <p:txBody>
+          <a:bodyPr/>
+          <a:lstStyle/>
+          <a:p>
+            <a:endParaRPr lang="en-US"/>
+          </a:p>
+        </p:txBody>
       </p:sp>
       <p:sp>
         <p:nvSpPr>
@@ -3361,7 +3351,7 @@
           <a:bodyPr wrap="square" lIns="0" tIns="0" rIns="0" bIns="0" rtlCol="0" anchor="ctr"/>
           <a:lstStyle/>
           <a:p>
-            <a:pPr indent="0" marL="0">
+            <a:pPr marL="0" indent="0">
               <a:buNone/>
             </a:pPr>
             <a:r>
@@ -3403,6 +3393,13 @@
             <a:prstDash val="solid"/>
           </a:ln>
         </p:spPr>
+        <p:txBody>
+          <a:bodyPr/>
+          <a:lstStyle/>
+          <a:p>
+            <a:endParaRPr lang="en-US"/>
+          </a:p>
+        </p:txBody>
       </p:sp>
       <p:sp>
         <p:nvSpPr>
@@ -3425,7 +3422,7 @@
           <a:bodyPr wrap="square" lIns="0" tIns="0" rIns="0" bIns="0" rtlCol="0" anchor="ctr"/>
           <a:lstStyle/>
           <a:p>
-            <a:pPr indent="0" marL="0">
+            <a:pPr marL="0" indent="0">
               <a:buNone/>
             </a:pPr>
             <a:r>
@@ -3467,6 +3464,13 @@
             <a:prstDash val="solid"/>
           </a:ln>
         </p:spPr>
+        <p:txBody>
+          <a:bodyPr/>
+          <a:lstStyle/>
+          <a:p>
+            <a:endParaRPr lang="en-US"/>
+          </a:p>
+        </p:txBody>
       </p:sp>
       <p:sp>
         <p:nvSpPr>
@@ -3489,7 +3493,7 @@
           <a:bodyPr wrap="square" lIns="0" tIns="0" rIns="0" bIns="0" rtlCol="0" anchor="ctr"/>
           <a:lstStyle/>
           <a:p>
-            <a:pPr indent="0" marL="0">
+            <a:pPr marL="0" indent="0">
               <a:buNone/>
             </a:pPr>
             <a:r>
@@ -3533,13 +3537,20 @@
             <a:prstDash val="solid"/>
           </a:ln>
           <a:effectLst>
-            <a:outerShdw sx="100000" sy="100000" kx="0" ky="0" algn="bl" rotWithShape="0" blurRad="101600" dist="25400" dir="8100000">
+            <a:outerShdw blurRad="101600" dist="25400" dir="8100000" algn="bl" rotWithShape="0">
               <a:srgbClr val="000000">
                 <a:alpha val="10000"/>
               </a:srgbClr>
             </a:outerShdw>
           </a:effectLst>
         </p:spPr>
+        <p:txBody>
+          <a:bodyPr/>
+          <a:lstStyle/>
+          <a:p>
+            <a:endParaRPr lang="en-US"/>
+          </a:p>
+        </p:txBody>
       </p:sp>
       <p:sp>
         <p:nvSpPr>
@@ -3562,11 +3573,11 @@
           <a:bodyPr wrap="square" lIns="0" tIns="0" rIns="0" bIns="0" rtlCol="0" anchor="ctr"/>
           <a:lstStyle/>
           <a:p>
-            <a:pPr indent="0" marL="0">
+            <a:pPr marL="0" indent="0">
               <a:buNone/>
             </a:pPr>
             <a:r>
-              <a:rPr lang="en-US" sz="1200" b="1" spc="200" kern="0" dirty="0">
+              <a:rPr lang="en-US" sz="1200" b="1" kern="0" spc="200" dirty="0">
                 <a:solidFill>
                   <a:srgbClr val="FFFFFF"/>
                 </a:solidFill>
@@ -3601,7 +3612,7 @@
           <a:bodyPr wrap="square" lIns="0" tIns="0" rIns="0" bIns="0" rtlCol="0" anchor="ctr"/>
           <a:lstStyle/>
           <a:p>
-            <a:pPr indent="0" marL="0">
+            <a:pPr marL="0" indent="0">
               <a:buNone/>
             </a:pPr>
             <a:r>
@@ -3645,6 +3656,13 @@
             <a:prstDash val="solid"/>
           </a:ln>
         </p:spPr>
+        <p:txBody>
+          <a:bodyPr/>
+          <a:lstStyle/>
+          <a:p>
+            <a:endParaRPr lang="en-US"/>
+          </a:p>
+        </p:txBody>
       </p:sp>
       <p:sp>
         <p:nvSpPr>
@@ -3670,6 +3688,13 @@
             <a:prstDash val="solid"/>
           </a:ln>
         </p:spPr>
+        <p:txBody>
+          <a:bodyPr/>
+          <a:lstStyle/>
+          <a:p>
+            <a:endParaRPr lang="en-US"/>
+          </a:p>
+        </p:txBody>
       </p:sp>
       <p:sp>
         <p:nvSpPr>
@@ -3692,7 +3717,7 @@
           <a:bodyPr wrap="square" lIns="0" tIns="0" rIns="0" bIns="0" rtlCol="0" anchor="ctr"/>
           <a:lstStyle/>
           <a:p>
-            <a:pPr indent="0" marL="0">
+            <a:pPr marL="0" indent="0">
               <a:buNone/>
             </a:pPr>
             <a:r>
@@ -3706,9 +3731,6 @@
               </a:rPr>
               <a:t>RENDERING</a:t>
             </a:r>
-            <a:pPr indent="0" marL="0">
-              <a:buNone/>
-            </a:pPr>
             <a:r>
               <a:rPr lang="en-US" sz="750" dirty="0">
                 <a:solidFill>
@@ -3750,6 +3772,13 @@
             <a:prstDash val="solid"/>
           </a:ln>
         </p:spPr>
+        <p:txBody>
+          <a:bodyPr/>
+          <a:lstStyle/>
+          <a:p>
+            <a:endParaRPr lang="en-US"/>
+          </a:p>
+        </p:txBody>
       </p:sp>
       <p:sp>
         <p:nvSpPr>
@@ -3772,7 +3801,7 @@
           <a:bodyPr wrap="square" lIns="0" tIns="0" rIns="0" bIns="0" rtlCol="0" anchor="ctr"/>
           <a:lstStyle/>
           <a:p>
-            <a:pPr indent="0" marL="0">
+            <a:pPr marL="0" indent="0">
               <a:buNone/>
             </a:pPr>
             <a:r>
@@ -3786,9 +3815,6 @@
               </a:rPr>
               <a:t>Dynamic renderer  </a:t>
             </a:r>
-            <a:pPr indent="0" marL="0">
-              <a:buNone/>
-            </a:pPr>
             <a:r>
               <a:rPr lang="en-US" sz="650" dirty="0">
                 <a:solidFill>
@@ -3830,6 +3856,13 @@
             <a:prstDash val="solid"/>
           </a:ln>
         </p:spPr>
+        <p:txBody>
+          <a:bodyPr/>
+          <a:lstStyle/>
+          <a:p>
+            <a:endParaRPr lang="en-US"/>
+          </a:p>
+        </p:txBody>
       </p:sp>
       <p:sp>
         <p:nvSpPr>
@@ -3852,7 +3885,7 @@
           <a:bodyPr wrap="square" lIns="0" tIns="0" rIns="0" bIns="0" rtlCol="0" anchor="ctr"/>
           <a:lstStyle/>
           <a:p>
-            <a:pPr indent="0" marL="0">
+            <a:pPr marL="0" indent="0">
               <a:buNone/>
             </a:pPr>
             <a:r>
@@ -3866,9 +3899,6 @@
               </a:rPr>
               <a:t>Runtime navigation  </a:t>
             </a:r>
-            <a:pPr indent="0" marL="0">
-              <a:buNone/>
-            </a:pPr>
             <a:r>
               <a:rPr lang="en-US" sz="650" dirty="0">
                 <a:solidFill>
@@ -3910,6 +3940,13 @@
             <a:prstDash val="solid"/>
           </a:ln>
         </p:spPr>
+        <p:txBody>
+          <a:bodyPr/>
+          <a:lstStyle/>
+          <a:p>
+            <a:endParaRPr lang="en-US"/>
+          </a:p>
+        </p:txBody>
       </p:sp>
       <p:sp>
         <p:nvSpPr>
@@ -3932,7 +3969,7 @@
           <a:bodyPr wrap="square" lIns="0" tIns="0" rIns="0" bIns="0" rtlCol="0" anchor="ctr"/>
           <a:lstStyle/>
           <a:p>
-            <a:pPr indent="0" marL="0">
+            <a:pPr marL="0" indent="0">
               <a:buNone/>
             </a:pPr>
             <a:r>
@@ -3946,9 +3983,6 @@
               </a:rPr>
               <a:t>Live on next request  </a:t>
             </a:r>
-            <a:pPr indent="0" marL="0">
-              <a:buNone/>
-            </a:pPr>
             <a:r>
               <a:rPr lang="en-US" sz="650" dirty="0">
                 <a:solidFill>
@@ -3990,6 +4024,13 @@
             <a:prstDash val="solid"/>
           </a:ln>
         </p:spPr>
+        <p:txBody>
+          <a:bodyPr/>
+          <a:lstStyle/>
+          <a:p>
+            <a:endParaRPr lang="en-US"/>
+          </a:p>
+        </p:txBody>
       </p:sp>
       <p:sp>
         <p:nvSpPr>
@@ -4015,6 +4056,13 @@
             <a:prstDash val="solid"/>
           </a:ln>
         </p:spPr>
+        <p:txBody>
+          <a:bodyPr/>
+          <a:lstStyle/>
+          <a:p>
+            <a:endParaRPr lang="en-US"/>
+          </a:p>
+        </p:txBody>
       </p:sp>
       <p:sp>
         <p:nvSpPr>
@@ -4037,7 +4085,7 @@
           <a:bodyPr wrap="square" lIns="0" tIns="0" rIns="0" bIns="0" rtlCol="0" anchor="ctr"/>
           <a:lstStyle/>
           <a:p>
-            <a:pPr indent="0" marL="0">
+            <a:pPr marL="0" indent="0">
               <a:buNone/>
             </a:pPr>
             <a:r>
@@ -4049,11 +4097,8 @@
                 <a:ea typeface="Trebuchet MS" pitchFamily="34" charset="-122"/>
                 <a:cs typeface="Trebuchet MS" pitchFamily="34" charset="-120"/>
               </a:rPr>
-              <a:t>SELF-UPDATE LOGIC</a:t>
-            </a:r>
-            <a:pPr indent="0" marL="0">
-              <a:buNone/>
-            </a:pPr>
+              <a:t>SELF-UPDATING ARTICLES</a:t>
+            </a:r>
             <a:r>
               <a:rPr lang="en-US" sz="750" dirty="0">
                 <a:solidFill>
@@ -4063,7 +4108,7 @@
                 <a:ea typeface="Trebuchet MS" pitchFamily="34" charset="-122"/>
                 <a:cs typeface="Trebuchet MS" pitchFamily="34" charset="-120"/>
               </a:rPr>
-              <a:t>   Detect → Assess → Propose → Execute, under human governance</a:t>
+              <a:t> Detect → Assess → Propose → Execute, under human governance</a:t>
             </a:r>
             <a:endParaRPr lang="en-US" sz="950" dirty="0"/>
           </a:p>
@@ -4095,6 +4140,13 @@
             <a:prstDash val="solid"/>
           </a:ln>
         </p:spPr>
+        <p:txBody>
+          <a:bodyPr/>
+          <a:lstStyle/>
+          <a:p>
+            <a:endParaRPr lang="en-US"/>
+          </a:p>
+        </p:txBody>
       </p:sp>
       <p:sp>
         <p:nvSpPr>
@@ -4120,6 +4172,13 @@
             <a:prstDash val="solid"/>
           </a:ln>
         </p:spPr>
+        <p:txBody>
+          <a:bodyPr/>
+          <a:lstStyle/>
+          <a:p>
+            <a:endParaRPr lang="en-US"/>
+          </a:p>
+        </p:txBody>
       </p:sp>
       <p:sp>
         <p:nvSpPr>
@@ -4142,7 +4201,7 @@
           <a:bodyPr wrap="square" lIns="0" tIns="0" rIns="0" bIns="0" rtlCol="0" anchor="ctr"/>
           <a:lstStyle/>
           <a:p>
-            <a:pPr indent="0" marL="0">
+            <a:pPr marL="0" indent="0">
               <a:buNone/>
             </a:pPr>
             <a:r>
@@ -4271,6 +4330,13 @@
             <a:prstDash val="solid"/>
           </a:ln>
         </p:spPr>
+        <p:txBody>
+          <a:bodyPr/>
+          <a:lstStyle/>
+          <a:p>
+            <a:endParaRPr lang="en-US"/>
+          </a:p>
+        </p:txBody>
       </p:sp>
       <p:sp>
         <p:nvSpPr>
@@ -4296,6 +4362,13 @@
             <a:prstDash val="solid"/>
           </a:ln>
         </p:spPr>
+        <p:txBody>
+          <a:bodyPr/>
+          <a:lstStyle/>
+          <a:p>
+            <a:endParaRPr lang="en-US"/>
+          </a:p>
+        </p:txBody>
       </p:sp>
       <p:sp>
         <p:nvSpPr>
@@ -4318,7 +4391,7 @@
           <a:bodyPr wrap="square" lIns="0" tIns="0" rIns="0" bIns="0" rtlCol="0" anchor="ctr"/>
           <a:lstStyle/>
           <a:p>
-            <a:pPr indent="0" marL="0">
+            <a:pPr marL="0" indent="0">
               <a:buNone/>
             </a:pPr>
             <a:r>
@@ -4447,6 +4520,13 @@
             <a:prstDash val="solid"/>
           </a:ln>
         </p:spPr>
+        <p:txBody>
+          <a:bodyPr/>
+          <a:lstStyle/>
+          <a:p>
+            <a:endParaRPr lang="en-US"/>
+          </a:p>
+        </p:txBody>
       </p:sp>
       <p:sp>
         <p:nvSpPr>
@@ -4472,6 +4552,13 @@
             <a:prstDash val="solid"/>
           </a:ln>
         </p:spPr>
+        <p:txBody>
+          <a:bodyPr/>
+          <a:lstStyle/>
+          <a:p>
+            <a:endParaRPr lang="en-US"/>
+          </a:p>
+        </p:txBody>
       </p:sp>
       <p:sp>
         <p:nvSpPr>
@@ -4494,7 +4581,7 @@
           <a:bodyPr wrap="square" lIns="0" tIns="0" rIns="0" bIns="0" rtlCol="0" anchor="ctr"/>
           <a:lstStyle/>
           <a:p>
-            <a:pPr indent="0" marL="0">
+            <a:pPr marL="0" indent="0">
               <a:buNone/>
             </a:pPr>
             <a:r>
@@ -4623,6 +4710,13 @@
             <a:prstDash val="solid"/>
           </a:ln>
         </p:spPr>
+        <p:txBody>
+          <a:bodyPr/>
+          <a:lstStyle/>
+          <a:p>
+            <a:endParaRPr lang="en-US"/>
+          </a:p>
+        </p:txBody>
       </p:sp>
       <p:sp>
         <p:nvSpPr>
@@ -4648,6 +4742,13 @@
             <a:prstDash val="solid"/>
           </a:ln>
         </p:spPr>
+        <p:txBody>
+          <a:bodyPr/>
+          <a:lstStyle/>
+          <a:p>
+            <a:endParaRPr lang="en-US"/>
+          </a:p>
+        </p:txBody>
       </p:sp>
       <p:sp>
         <p:nvSpPr>
@@ -4670,7 +4771,7 @@
           <a:bodyPr wrap="square" lIns="0" tIns="0" rIns="0" bIns="0" rtlCol="0" anchor="ctr"/>
           <a:lstStyle/>
           <a:p>
-            <a:pPr indent="0" marL="0">
+            <a:pPr marL="0" indent="0">
               <a:buNone/>
             </a:pPr>
             <a:r>
@@ -4799,6 +4900,13 @@
             <a:prstDash val="solid"/>
           </a:ln>
         </p:spPr>
+        <p:txBody>
+          <a:bodyPr/>
+          <a:lstStyle/>
+          <a:p>
+            <a:endParaRPr lang="en-US"/>
+          </a:p>
+        </p:txBody>
       </p:sp>
       <p:sp>
         <p:nvSpPr>
@@ -4824,6 +4932,13 @@
             <a:prstDash val="solid"/>
           </a:ln>
         </p:spPr>
+        <p:txBody>
+          <a:bodyPr/>
+          <a:lstStyle/>
+          <a:p>
+            <a:endParaRPr lang="en-US"/>
+          </a:p>
+        </p:txBody>
       </p:sp>
       <p:sp>
         <p:nvSpPr>
@@ -4846,7 +4961,7 @@
           <a:bodyPr wrap="square" lIns="0" tIns="0" rIns="0" bIns="0" rtlCol="0" anchor="ctr"/>
           <a:lstStyle/>
           <a:p>
-            <a:pPr indent="0" marL="0">
+            <a:pPr marL="0" indent="0">
               <a:buNone/>
             </a:pPr>
             <a:r>
@@ -4860,9 +4975,6 @@
               </a:rPr>
               <a:t>MULTI-SOURCE STORAGE</a:t>
             </a:r>
-            <a:pPr indent="0" marL="0">
-              <a:buNone/>
-            </a:pPr>
             <a:r>
               <a:rPr lang="en-US" sz="750" dirty="0">
                 <a:solidFill>
@@ -4904,124 +5016,17 @@
             <a:prstDash val="solid"/>
           </a:ln>
         </p:spPr>
+        <p:txBody>
+          <a:bodyPr/>
+          <a:lstStyle/>
+          <a:p>
+            <a:endParaRPr lang="en-US"/>
+          </a:p>
+        </p:txBody>
       </p:sp>
       <p:pic>
         <p:nvPicPr>
-          <p:cNvPr id="113" name="Image 8" descr="preencoded.png">    </p:cNvPr>
-          <p:cNvPicPr>
-            <a:picLocks noChangeAspect="1"/>
-          </p:cNvPicPr>
-          <p:nvPr/>
-        </p:nvPicPr>
-        <p:blipFill>
-          <a:blip r:embed="rId9"/>
-          <a:stretch>
-            <a:fillRect/>
-          </a:stretch>
-        </p:blipFill>
-        <p:spPr>
-          <a:xfrm>
-            <a:off x="1453896" y="6176772"/>
-            <a:ext cx="137160" cy="137160"/>
-          </a:xfrm>
-          <a:prstGeom prst="rect">
-            <a:avLst/>
-          </a:prstGeom>
-        </p:spPr>
-      </p:pic>
-      <p:sp>
-        <p:nvSpPr>
-          <p:cNvPr id="114" name="Text 103"/>
-          <p:cNvSpPr/>
-          <p:nvPr/>
-        </p:nvSpPr>
-        <p:spPr>
-          <a:xfrm>
-            <a:off x="1636776" y="6108192"/>
-            <a:ext cx="1092708" cy="274320"/>
-          </a:xfrm>
-          <a:prstGeom prst="rect">
-            <a:avLst/>
-          </a:prstGeom>
-          <a:noFill/>
-          <a:ln/>
-        </p:spPr>
-        <p:txBody>
-          <a:bodyPr wrap="square" lIns="0" tIns="0" rIns="0" bIns="0" rtlCol="0" anchor="ctr"/>
-          <a:lstStyle/>
-          <a:p>
-            <a:pPr indent="0" marL="0">
-              <a:buNone/>
-            </a:pPr>
-            <a:r>
-              <a:rPr lang="en-US" sz="700" b="1" dirty="0">
-                <a:solidFill>
-                  <a:srgbClr val="FFFFFF"/>
-                </a:solidFill>
-                <a:latin typeface="Calibri" pitchFamily="34" charset="0"/>
-                <a:ea typeface="Calibri" pitchFamily="34" charset="-122"/>
-                <a:cs typeface="Calibri" pitchFamily="34" charset="-120"/>
-              </a:rPr>
-              <a:t>Public GitHub repo</a:t>
-            </a:r>
-            <a:endParaRPr lang="en-US" sz="700" dirty="0"/>
-          </a:p>
-        </p:txBody>
-      </p:sp>
-      <p:pic>
-        <p:nvPicPr>
-          <p:cNvPr id="115" name="Image 9" descr="preencoded.png">    </p:cNvPr>
-          <p:cNvPicPr>
-            <a:picLocks noChangeAspect="1"/>
-          </p:cNvPicPr>
-          <p:nvPr/>
-        </p:nvPicPr>
-        <p:blipFill>
-          <a:blip r:embed="rId10"/>
-          <a:stretch>
-            <a:fillRect/>
-          </a:stretch>
-        </p:blipFill>
-        <p:spPr>
-          <a:xfrm>
-            <a:off x="2756916" y="6185916"/>
-            <a:ext cx="118872" cy="118872"/>
-          </a:xfrm>
-          <a:prstGeom prst="rect">
-            <a:avLst/>
-          </a:prstGeom>
-        </p:spPr>
-      </p:pic>
-      <p:sp>
-        <p:nvSpPr>
-          <p:cNvPr id="116" name="Shape 104"/>
-          <p:cNvSpPr/>
-          <p:nvPr/>
-        </p:nvSpPr>
-        <p:spPr>
-          <a:xfrm>
-            <a:off x="3058668" y="6108192"/>
-            <a:ext cx="1568196" cy="274320"/>
-          </a:xfrm>
-          <a:prstGeom prst="roundRect">
-            <a:avLst>
-              <a:gd name="adj" fmla="val 10000"/>
-            </a:avLst>
-          </a:prstGeom>
-          <a:solidFill>
-            <a:srgbClr val="33437E"/>
-          </a:solidFill>
-          <a:ln w="12700">
-            <a:solidFill>
-              <a:srgbClr val="333333"/>
-            </a:solidFill>
-            <a:prstDash val="solid"/>
-          </a:ln>
-        </p:spPr>
-      </p:sp>
-      <p:pic>
-        <p:nvPicPr>
-          <p:cNvPr id="117" name="Image 10" descr="preencoded.png">    </p:cNvPr>
+          <p:cNvPr id="113" name="Image 8" descr="preencoded.png"/>
           <p:cNvPicPr>
             <a:picLocks noChangeAspect="1"/>
           </p:cNvPicPr>
@@ -5035,7 +5040,7 @@
         </p:blipFill>
         <p:spPr>
           <a:xfrm>
-            <a:off x="3131820" y="6176772"/>
+            <a:off x="1453896" y="6176772"/>
             <a:ext cx="137160" cy="137160"/>
           </a:xfrm>
           <a:prstGeom prst="rect">
@@ -5045,13 +5050,13 @@
       </p:pic>
       <p:sp>
         <p:nvSpPr>
-          <p:cNvPr id="118" name="Text 105"/>
-          <p:cNvSpPr/>
-          <p:nvPr/>
-        </p:nvSpPr>
-        <p:spPr>
-          <a:xfrm>
-            <a:off x="3314700" y="6108192"/>
+          <p:cNvPr id="114" name="Text 103"/>
+          <p:cNvSpPr/>
+          <p:nvPr/>
+        </p:nvSpPr>
+        <p:spPr>
+          <a:xfrm>
+            <a:off x="1636776" y="6108192"/>
             <a:ext cx="1092708" cy="274320"/>
           </a:xfrm>
           <a:prstGeom prst="rect">
@@ -5064,7 +5069,7 @@
           <a:bodyPr wrap="square" lIns="0" tIns="0" rIns="0" bIns="0" rtlCol="0" anchor="ctr"/>
           <a:lstStyle/>
           <a:p>
-            <a:pPr indent="0" marL="0">
+            <a:pPr marL="0" indent="0">
               <a:buNone/>
             </a:pPr>
             <a:r>
@@ -5076,7 +5081,7 @@
                 <a:ea typeface="Calibri" pitchFamily="34" charset="-122"/>
                 <a:cs typeface="Calibri" pitchFamily="34" charset="-120"/>
               </a:rPr>
-              <a:t>Public storage account</a:t>
+              <a:t>Public GitHub repo</a:t>
             </a:r>
             <a:endParaRPr lang="en-US" sz="700" dirty="0"/>
           </a:p>
@@ -5084,7 +5089,7 @@
       </p:sp>
       <p:pic>
         <p:nvPicPr>
-          <p:cNvPr id="119" name="Image 11" descr="preencoded.png">    </p:cNvPr>
+          <p:cNvPr id="115" name="Image 9" descr="preencoded.png"/>
           <p:cNvPicPr>
             <a:picLocks noChangeAspect="1"/>
           </p:cNvPicPr>
@@ -5098,7 +5103,7 @@
         </p:blipFill>
         <p:spPr>
           <a:xfrm>
-            <a:off x="4434840" y="6185916"/>
+            <a:off x="2756916" y="6185916"/>
             <a:ext cx="118872" cy="118872"/>
           </a:xfrm>
           <a:prstGeom prst="rect">
@@ -5108,13 +5113,13 @@
       </p:pic>
       <p:sp>
         <p:nvSpPr>
-          <p:cNvPr id="120" name="Shape 106"/>
-          <p:cNvSpPr/>
-          <p:nvPr/>
-        </p:nvSpPr>
-        <p:spPr>
-          <a:xfrm>
-            <a:off x="4736592" y="6108192"/>
+          <p:cNvPr id="116" name="Shape 104"/>
+          <p:cNvSpPr/>
+          <p:nvPr/>
+        </p:nvSpPr>
+        <p:spPr>
+          <a:xfrm>
+            <a:off x="3058668" y="6108192"/>
             <a:ext cx="1568196" cy="274320"/>
           </a:xfrm>
           <a:prstGeom prst="roundRect">
@@ -5132,10 +5137,17 @@
             <a:prstDash val="solid"/>
           </a:ln>
         </p:spPr>
+        <p:txBody>
+          <a:bodyPr/>
+          <a:lstStyle/>
+          <a:p>
+            <a:endParaRPr lang="en-US"/>
+          </a:p>
+        </p:txBody>
       </p:sp>
       <p:pic>
         <p:nvPicPr>
-          <p:cNvPr id="121" name="Image 12" descr="preencoded.png">    </p:cNvPr>
+          <p:cNvPr id="117" name="Image 10" descr="preencoded.png"/>
           <p:cNvPicPr>
             <a:picLocks noChangeAspect="1"/>
           </p:cNvPicPr>
@@ -5149,7 +5161,7 @@
         </p:blipFill>
         <p:spPr>
           <a:xfrm>
-            <a:off x="4809744" y="6176772"/>
+            <a:off x="3131820" y="6176772"/>
             <a:ext cx="137160" cy="137160"/>
           </a:xfrm>
           <a:prstGeom prst="rect">
@@ -5159,13 +5171,13 @@
       </p:pic>
       <p:sp>
         <p:nvSpPr>
-          <p:cNvPr id="122" name="Text 107"/>
-          <p:cNvSpPr/>
-          <p:nvPr/>
-        </p:nvSpPr>
-        <p:spPr>
-          <a:xfrm>
-            <a:off x="4992624" y="6108192"/>
+          <p:cNvPr id="118" name="Text 105"/>
+          <p:cNvSpPr/>
+          <p:nvPr/>
+        </p:nvSpPr>
+        <p:spPr>
+          <a:xfrm>
+            <a:off x="3314700" y="6108192"/>
             <a:ext cx="1092708" cy="274320"/>
           </a:xfrm>
           <a:prstGeom prst="rect">
@@ -5178,7 +5190,7 @@
           <a:bodyPr wrap="square" lIns="0" tIns="0" rIns="0" bIns="0" rtlCol="0" anchor="ctr"/>
           <a:lstStyle/>
           <a:p>
-            <a:pPr indent="0" marL="0">
+            <a:pPr marL="0" indent="0">
               <a:buNone/>
             </a:pPr>
             <a:r>
@@ -5190,7 +5202,7 @@
                 <a:ea typeface="Calibri" pitchFamily="34" charset="-122"/>
                 <a:cs typeface="Calibri" pitchFamily="34" charset="-120"/>
               </a:rPr>
-              <a:t>Private storage account</a:t>
+              <a:t>Public storage account</a:t>
             </a:r>
             <a:endParaRPr lang="en-US" sz="700" dirty="0"/>
           </a:p>
@@ -5198,7 +5210,65 @@
       </p:sp>
       <p:pic>
         <p:nvPicPr>
-          <p:cNvPr id="123" name="Image 13" descr="preencoded.png">    </p:cNvPr>
+          <p:cNvPr id="119" name="Image 11" descr="preencoded.png"/>
+          <p:cNvPicPr>
+            <a:picLocks noChangeAspect="1"/>
+          </p:cNvPicPr>
+          <p:nvPr/>
+        </p:nvPicPr>
+        <p:blipFill>
+          <a:blip r:embed="rId12"/>
+          <a:stretch>
+            <a:fillRect/>
+          </a:stretch>
+        </p:blipFill>
+        <p:spPr>
+          <a:xfrm>
+            <a:off x="4434840" y="6185916"/>
+            <a:ext cx="118872" cy="118872"/>
+          </a:xfrm>
+          <a:prstGeom prst="rect">
+            <a:avLst/>
+          </a:prstGeom>
+        </p:spPr>
+      </p:pic>
+      <p:sp>
+        <p:nvSpPr>
+          <p:cNvPr id="120" name="Shape 106"/>
+          <p:cNvSpPr/>
+          <p:nvPr/>
+        </p:nvSpPr>
+        <p:spPr>
+          <a:xfrm>
+            <a:off x="4736592" y="6108192"/>
+            <a:ext cx="1568196" cy="274320"/>
+          </a:xfrm>
+          <a:prstGeom prst="roundRect">
+            <a:avLst>
+              <a:gd name="adj" fmla="val 10000"/>
+            </a:avLst>
+          </a:prstGeom>
+          <a:solidFill>
+            <a:srgbClr val="33437E"/>
+          </a:solidFill>
+          <a:ln w="12700">
+            <a:solidFill>
+              <a:srgbClr val="333333"/>
+            </a:solidFill>
+            <a:prstDash val="solid"/>
+          </a:ln>
+        </p:spPr>
+        <p:txBody>
+          <a:bodyPr/>
+          <a:lstStyle/>
+          <a:p>
+            <a:endParaRPr lang="en-US"/>
+          </a:p>
+        </p:txBody>
+      </p:sp>
+      <p:pic>
+        <p:nvPicPr>
+          <p:cNvPr id="121" name="Image 12" descr="preencoded.png"/>
           <p:cNvPicPr>
             <a:picLocks noChangeAspect="1"/>
           </p:cNvPicPr>
@@ -5212,8 +5282,8 @@
         </p:blipFill>
         <p:spPr>
           <a:xfrm>
-            <a:off x="6112764" y="6185916"/>
-            <a:ext cx="118872" cy="118872"/>
+            <a:off x="4809744" y="6176772"/>
+            <a:ext cx="137160" cy="137160"/>
           </a:xfrm>
           <a:prstGeom prst="rect">
             <a:avLst/>
@@ -5222,34 +5292,46 @@
       </p:pic>
       <p:sp>
         <p:nvSpPr>
-          <p:cNvPr id="124" name="Shape 108"/>
-          <p:cNvSpPr/>
-          <p:nvPr/>
-        </p:nvSpPr>
-        <p:spPr>
-          <a:xfrm>
-            <a:off x="6414516" y="6108192"/>
-            <a:ext cx="1568196" cy="274320"/>
-          </a:xfrm>
-          <a:prstGeom prst="roundRect">
-            <a:avLst>
-              <a:gd name="adj" fmla="val 10000"/>
-            </a:avLst>
-          </a:prstGeom>
-          <a:solidFill>
-            <a:srgbClr val="33437E"/>
-          </a:solidFill>
-          <a:ln w="12700">
-            <a:solidFill>
-              <a:srgbClr val="333333"/>
-            </a:solidFill>
-            <a:prstDash val="solid"/>
-          </a:ln>
-        </p:spPr>
+          <p:cNvPr id="122" name="Text 107"/>
+          <p:cNvSpPr/>
+          <p:nvPr/>
+        </p:nvSpPr>
+        <p:spPr>
+          <a:xfrm>
+            <a:off x="4992624" y="6108192"/>
+            <a:ext cx="1092708" cy="274320"/>
+          </a:xfrm>
+          <a:prstGeom prst="rect">
+            <a:avLst/>
+          </a:prstGeom>
+          <a:noFill/>
+          <a:ln/>
+        </p:spPr>
+        <p:txBody>
+          <a:bodyPr wrap="square" lIns="0" tIns="0" rIns="0" bIns="0" rtlCol="0" anchor="ctr"/>
+          <a:lstStyle/>
+          <a:p>
+            <a:pPr marL="0" indent="0">
+              <a:buNone/>
+            </a:pPr>
+            <a:r>
+              <a:rPr lang="en-US" sz="700" b="1" dirty="0">
+                <a:solidFill>
+                  <a:srgbClr val="FFFFFF"/>
+                </a:solidFill>
+                <a:latin typeface="Calibri" pitchFamily="34" charset="0"/>
+                <a:ea typeface="Calibri" pitchFamily="34" charset="-122"/>
+                <a:cs typeface="Calibri" pitchFamily="34" charset="-120"/>
+              </a:rPr>
+              <a:t>Private storage account</a:t>
+            </a:r>
+            <a:endParaRPr lang="en-US" sz="700" dirty="0"/>
+          </a:p>
+        </p:txBody>
       </p:sp>
       <p:pic>
         <p:nvPicPr>
-          <p:cNvPr id="125" name="Image 14" descr="preencoded.png">    </p:cNvPr>
+          <p:cNvPr id="123" name="Image 13" descr="preencoded.png"/>
           <p:cNvPicPr>
             <a:picLocks noChangeAspect="1"/>
           </p:cNvPicPr>
@@ -5263,8 +5345,8 @@
         </p:blipFill>
         <p:spPr>
           <a:xfrm>
-            <a:off x="6487668" y="6176772"/>
-            <a:ext cx="137160" cy="137160"/>
+            <a:off x="6112764" y="6185916"/>
+            <a:ext cx="118872" cy="118872"/>
           </a:xfrm>
           <a:prstGeom prst="rect">
             <a:avLst/>
@@ -5273,46 +5355,41 @@
       </p:pic>
       <p:sp>
         <p:nvSpPr>
-          <p:cNvPr id="126" name="Text 109"/>
-          <p:cNvSpPr/>
-          <p:nvPr/>
-        </p:nvSpPr>
-        <p:spPr>
-          <a:xfrm>
-            <a:off x="6670548" y="6108192"/>
-            <a:ext cx="1092708" cy="274320"/>
-          </a:xfrm>
-          <a:prstGeom prst="rect">
-            <a:avLst/>
-          </a:prstGeom>
-          <a:noFill/>
-          <a:ln/>
-        </p:spPr>
-        <p:txBody>
-          <a:bodyPr wrap="square" lIns="0" tIns="0" rIns="0" bIns="0" rtlCol="0" anchor="ctr"/>
-          <a:lstStyle/>
-          <a:p>
-            <a:pPr indent="0" marL="0">
-              <a:buNone/>
-            </a:pPr>
-            <a:r>
-              <a:rPr lang="en-US" sz="700" b="1" dirty="0">
-                <a:solidFill>
-                  <a:srgbClr val="FFFFFF"/>
-                </a:solidFill>
-                <a:latin typeface="Calibri" pitchFamily="34" charset="0"/>
-                <a:ea typeface="Calibri" pitchFamily="34" charset="-122"/>
-                <a:cs typeface="Calibri" pitchFamily="34" charset="-120"/>
-              </a:rPr>
-              <a:t>Private OneDrive</a:t>
-            </a:r>
-            <a:endParaRPr lang="en-US" sz="700" dirty="0"/>
+          <p:cNvPr id="124" name="Shape 108"/>
+          <p:cNvSpPr/>
+          <p:nvPr/>
+        </p:nvSpPr>
+        <p:spPr>
+          <a:xfrm>
+            <a:off x="6414516" y="6108192"/>
+            <a:ext cx="1568196" cy="274320"/>
+          </a:xfrm>
+          <a:prstGeom prst="roundRect">
+            <a:avLst>
+              <a:gd name="adj" fmla="val 10000"/>
+            </a:avLst>
+          </a:prstGeom>
+          <a:solidFill>
+            <a:srgbClr val="33437E"/>
+          </a:solidFill>
+          <a:ln w="12700">
+            <a:solidFill>
+              <a:srgbClr val="333333"/>
+            </a:solidFill>
+            <a:prstDash val="solid"/>
+          </a:ln>
+        </p:spPr>
+        <p:txBody>
+          <a:bodyPr/>
+          <a:lstStyle/>
+          <a:p>
+            <a:endParaRPr lang="en-US"/>
           </a:p>
         </p:txBody>
       </p:sp>
       <p:pic>
         <p:nvPicPr>
-          <p:cNvPr id="127" name="Image 15" descr="preencoded.png">    </p:cNvPr>
+          <p:cNvPr id="125" name="Image 14" descr="preencoded.png"/>
           <p:cNvPicPr>
             <a:picLocks noChangeAspect="1"/>
           </p:cNvPicPr>
@@ -5326,6 +5403,69 @@
         </p:blipFill>
         <p:spPr>
           <a:xfrm>
+            <a:off x="6487668" y="6176772"/>
+            <a:ext cx="137160" cy="137160"/>
+          </a:xfrm>
+          <a:prstGeom prst="rect">
+            <a:avLst/>
+          </a:prstGeom>
+        </p:spPr>
+      </p:pic>
+      <p:sp>
+        <p:nvSpPr>
+          <p:cNvPr id="126" name="Text 109"/>
+          <p:cNvSpPr/>
+          <p:nvPr/>
+        </p:nvSpPr>
+        <p:spPr>
+          <a:xfrm>
+            <a:off x="6670548" y="6108192"/>
+            <a:ext cx="1092708" cy="274320"/>
+          </a:xfrm>
+          <a:prstGeom prst="rect">
+            <a:avLst/>
+          </a:prstGeom>
+          <a:noFill/>
+          <a:ln/>
+        </p:spPr>
+        <p:txBody>
+          <a:bodyPr wrap="square" lIns="0" tIns="0" rIns="0" bIns="0" rtlCol="0" anchor="ctr"/>
+          <a:lstStyle/>
+          <a:p>
+            <a:pPr marL="0" indent="0">
+              <a:buNone/>
+            </a:pPr>
+            <a:r>
+              <a:rPr lang="en-US" sz="700" b="1" dirty="0">
+                <a:solidFill>
+                  <a:srgbClr val="FFFFFF"/>
+                </a:solidFill>
+                <a:latin typeface="Calibri" pitchFamily="34" charset="0"/>
+                <a:ea typeface="Calibri" pitchFamily="34" charset="-122"/>
+                <a:cs typeface="Calibri" pitchFamily="34" charset="-120"/>
+              </a:rPr>
+              <a:t>Private OneDrive</a:t>
+            </a:r>
+            <a:endParaRPr lang="en-US" sz="700" dirty="0"/>
+          </a:p>
+        </p:txBody>
+      </p:sp>
+      <p:pic>
+        <p:nvPicPr>
+          <p:cNvPr id="127" name="Image 15" descr="preencoded.png"/>
+          <p:cNvPicPr>
+            <a:picLocks noChangeAspect="1"/>
+          </p:cNvPicPr>
+          <p:nvPr/>
+        </p:nvPicPr>
+        <p:blipFill>
+          <a:blip r:embed="rId15"/>
+          <a:stretch>
+            <a:fillRect/>
+          </a:stretch>
+        </p:blipFill>
+        <p:spPr>
+          <a:xfrm>
             <a:off x="7790688" y="6185916"/>
             <a:ext cx="118872" cy="118872"/>
           </a:xfrm>
@@ -5358,6 +5498,13 @@
             <a:prstDash val="solid"/>
           </a:ln>
         </p:spPr>
+        <p:txBody>
+          <a:bodyPr/>
+          <a:lstStyle/>
+          <a:p>
+            <a:endParaRPr lang="en-US"/>
+          </a:p>
+        </p:txBody>
       </p:sp>
       <p:sp>
         <p:nvSpPr>
@@ -5383,6 +5530,13 @@
             <a:prstDash val="solid"/>
           </a:ln>
         </p:spPr>
+        <p:txBody>
+          <a:bodyPr/>
+          <a:lstStyle/>
+          <a:p>
+            <a:endParaRPr lang="en-US"/>
+          </a:p>
+        </p:txBody>
       </p:sp>
       <p:sp>
         <p:nvSpPr>
@@ -5405,7 +5559,7 @@
           <a:bodyPr wrap="square" lIns="0" tIns="0" rIns="0" bIns="0" rtlCol="0" anchor="ctr"/>
           <a:lstStyle/>
           <a:p>
-            <a:pPr algn="ctr" indent="0" marL="0">
+            <a:pPr marL="0" indent="0" algn="ctr">
               <a:buNone/>
             </a:pPr>
             <a:r>
@@ -5444,7 +5598,7 @@
           <a:bodyPr wrap="square" lIns="0" tIns="0" rIns="0" bIns="0" rtlCol="0" anchor="ctr"/>
           <a:lstStyle/>
           <a:p>
-            <a:pPr algn="ctr" indent="0" marL="0">
+            <a:pPr marL="0" indent="0" algn="ctr">
               <a:buNone/>
             </a:pPr>
             <a:r>
@@ -5486,6 +5640,13 @@
             <a:prstDash val="solid"/>
           </a:ln>
         </p:spPr>
+        <p:txBody>
+          <a:bodyPr/>
+          <a:lstStyle/>
+          <a:p>
+            <a:endParaRPr lang="en-US"/>
+          </a:p>
+        </p:txBody>
       </p:sp>
       <p:sp>
         <p:nvSpPr>
@@ -5508,7 +5669,7 @@
           <a:bodyPr wrap="square" lIns="0" tIns="0" rIns="0" bIns="0" rtlCol="0" anchor="ctr"/>
           <a:lstStyle/>
           <a:p>
-            <a:pPr indent="0" marL="0">
+            <a:pPr marL="0" indent="0">
               <a:buNone/>
             </a:pPr>
             <a:r>
@@ -5550,6 +5711,13 @@
             <a:prstDash val="solid"/>
           </a:ln>
         </p:spPr>
+        <p:txBody>
+          <a:bodyPr/>
+          <a:lstStyle/>
+          <a:p>
+            <a:endParaRPr lang="en-US"/>
+          </a:p>
+        </p:txBody>
       </p:sp>
       <p:sp>
         <p:nvSpPr>
@@ -5572,7 +5740,7 @@
           <a:bodyPr wrap="square" lIns="0" tIns="0" rIns="0" bIns="0" rtlCol="0" anchor="ctr"/>
           <a:lstStyle/>
           <a:p>
-            <a:pPr algn="r" indent="0" marL="0">
+            <a:pPr marL="0" indent="0" algn="r">
               <a:buNone/>
             </a:pPr>
             <a:r>
@@ -5614,6 +5782,13 @@
             <a:prstDash val="solid"/>
           </a:ln>
         </p:spPr>
+        <p:txBody>
+          <a:bodyPr/>
+          <a:lstStyle/>
+          <a:p>
+            <a:endParaRPr lang="en-US"/>
+          </a:p>
+        </p:txBody>
       </p:sp>
       <p:sp>
         <p:nvSpPr>
@@ -5639,6 +5814,13 @@
             <a:prstDash val="solid"/>
           </a:ln>
         </p:spPr>
+        <p:txBody>
+          <a:bodyPr/>
+          <a:lstStyle/>
+          <a:p>
+            <a:endParaRPr lang="en-US"/>
+          </a:p>
+        </p:txBody>
       </p:sp>
       <p:sp>
         <p:nvSpPr>
@@ -5666,6 +5848,13 @@
             <a:prstDash val="solid"/>
           </a:ln>
         </p:spPr>
+        <p:txBody>
+          <a:bodyPr/>
+          <a:lstStyle/>
+          <a:p>
+            <a:endParaRPr lang="en-US"/>
+          </a:p>
+        </p:txBody>
       </p:sp>
       <p:sp>
         <p:nvSpPr>
@@ -5688,7 +5877,7 @@
           <a:bodyPr wrap="square" lIns="0" tIns="0" rIns="0" bIns="0" rtlCol="0" anchor="ctr"/>
           <a:lstStyle/>
           <a:p>
-            <a:pPr algn="ctr" indent="0" marL="0">
+            <a:pPr marL="0" indent="0" algn="ctr">
               <a:buNone/>
             </a:pPr>
             <a:r>
@@ -5732,6 +5921,13 @@
             <a:prstDash val="solid"/>
           </a:ln>
         </p:spPr>
+        <p:txBody>
+          <a:bodyPr/>
+          <a:lstStyle/>
+          <a:p>
+            <a:endParaRPr lang="en-US"/>
+          </a:p>
+        </p:txBody>
       </p:sp>
       <p:sp>
         <p:nvSpPr>
@@ -5754,7 +5950,7 @@
           <a:bodyPr wrap="square" lIns="0" tIns="0" rIns="0" bIns="0" rtlCol="0" anchor="ctr"/>
           <a:lstStyle/>
           <a:p>
-            <a:pPr algn="ctr" indent="0" marL="0">
+            <a:pPr marL="0" indent="0" algn="ctr">
               <a:buNone/>
             </a:pPr>
             <a:r>
@@ -6073,4 +6269,325 @@
     </a:ext>
   </a:extLst>
 </a:theme>
+</file>
+
+<file path=ppt/theme/theme2.xml><?xml version="1.0" encoding="utf-8"?>
+<a:theme xmlns:a="http://schemas.openxmlformats.org/drawingml/2006/main" name="Office Theme">
+  <a:themeElements>
+    <a:clrScheme name="Office">
+      <a:dk1>
+        <a:sysClr val="windowText" lastClr="000000"/>
+      </a:dk1>
+      <a:lt1>
+        <a:sysClr val="window" lastClr="FFFFFF"/>
+      </a:lt1>
+      <a:dk2>
+        <a:srgbClr val="0E2841"/>
+      </a:dk2>
+      <a:lt2>
+        <a:srgbClr val="E8E8E8"/>
+      </a:lt2>
+      <a:accent1>
+        <a:srgbClr val="156082"/>
+      </a:accent1>
+      <a:accent2>
+        <a:srgbClr val="E97132"/>
+      </a:accent2>
+      <a:accent3>
+        <a:srgbClr val="196B24"/>
+      </a:accent3>
+      <a:accent4>
+        <a:srgbClr val="0F9ED5"/>
+      </a:accent4>
+      <a:accent5>
+        <a:srgbClr val="A02B93"/>
+      </a:accent5>
+      <a:accent6>
+        <a:srgbClr val="4EA72E"/>
+      </a:accent6>
+      <a:hlink>
+        <a:srgbClr val="467886"/>
+      </a:hlink>
+      <a:folHlink>
+        <a:srgbClr val="96607D"/>
+      </a:folHlink>
+    </a:clrScheme>
+    <a:fontScheme name="Office">
+      <a:majorFont>
+        <a:latin typeface="Aptos Display" panose="02110004020202020204"/>
+        <a:ea typeface=""/>
+        <a:cs typeface=""/>
+        <a:font script="Jpan" typeface="游ゴシック Light"/>
+        <a:font script="Hang" typeface="맑은 고딕"/>
+        <a:font script="Hans" typeface="等线 Light"/>
+        <a:font script="Hant" typeface="新細明體"/>
+        <a:font script="Arab" typeface="Times New Roman"/>
+        <a:font script="Hebr" typeface="Times New Roman"/>
+        <a:font script="Thai" typeface="Angsana New"/>
+        <a:font script="Ethi" typeface="Nyala"/>
+        <a:font script="Beng" typeface="Vrinda"/>
+        <a:font script="Gujr" typeface="Shruti"/>
+        <a:font script="Khmr" typeface="MoolBoran"/>
+        <a:font script="Knda" typeface="Tunga"/>
+        <a:font script="Guru" typeface="Raavi"/>
+        <a:font script="Cans" typeface="Euphemia"/>
+        <a:font script="Cher" typeface="Plantagenet Cherokee"/>
+        <a:font script="Yiii" typeface="Microsoft Yi Baiti"/>
+        <a:font script="Tibt" typeface="Microsoft Himalaya"/>
+        <a:font script="Thaa" typeface="MV Boli"/>
+        <a:font script="Deva" typeface="Mangal"/>
+        <a:font script="Telu" typeface="Gautami"/>
+        <a:font script="Taml" typeface="Latha"/>
+        <a:font script="Syrc" typeface="Estrangelo Edessa"/>
+        <a:font script="Orya" typeface="Kalinga"/>
+        <a:font script="Mlym" typeface="Kartika"/>
+        <a:font script="Laoo" typeface="DokChampa"/>
+        <a:font script="Sinh" typeface="Iskoola Pota"/>
+        <a:font script="Mong" typeface="Mongolian Baiti"/>
+        <a:font script="Viet" typeface="Times New Roman"/>
+        <a:font script="Uigh" typeface="Microsoft Uighur"/>
+        <a:font script="Geor" typeface="Sylfaen"/>
+        <a:font script="Armn" typeface="Arial"/>
+        <a:font script="Bugi" typeface="Leelawadee UI"/>
+        <a:font script="Bopo" typeface="Microsoft JhengHei"/>
+        <a:font script="Java" typeface="Javanese Text"/>
+        <a:font script="Lisu" typeface="Segoe UI"/>
+        <a:font script="Mymr" typeface="Myanmar Text"/>
+        <a:font script="Nkoo" typeface="Ebrima"/>
+        <a:font script="Olck" typeface="Nirmala UI"/>
+        <a:font script="Osma" typeface="Ebrima"/>
+        <a:font script="Phag" typeface="Phagspa"/>
+        <a:font script="Syrn" typeface="Estrangelo Edessa"/>
+        <a:font script="Syrj" typeface="Estrangelo Edessa"/>
+        <a:font script="Syre" typeface="Estrangelo Edessa"/>
+        <a:font script="Sora" typeface="Nirmala UI"/>
+        <a:font script="Tale" typeface="Microsoft Tai Le"/>
+        <a:font script="Talu" typeface="Microsoft New Tai Lue"/>
+        <a:font script="Tfng" typeface="Ebrima"/>
+      </a:majorFont>
+      <a:minorFont>
+        <a:latin typeface="Aptos" panose="02110004020202020204"/>
+        <a:ea typeface=""/>
+        <a:cs typeface=""/>
+        <a:font script="Jpan" typeface="游ゴシック"/>
+        <a:font script="Hang" typeface="맑은 고딕"/>
+        <a:font script="Hans" typeface="等线"/>
+        <a:font script="Hant" typeface="新細明體"/>
+        <a:font script="Arab" typeface="Arial"/>
+        <a:font script="Hebr" typeface="Arial"/>
+        <a:font script="Thai" typeface="Cordia New"/>
+        <a:font script="Ethi" typeface="Nyala"/>
+        <a:font script="Beng" typeface="Vrinda"/>
+        <a:font script="Gujr" typeface="Shruti"/>
+        <a:font script="Khmr" typeface="DaunPenh"/>
+        <a:font script="Knda" typeface="Tunga"/>
+        <a:font script="Guru" typeface="Raavi"/>
+        <a:font script="Cans" typeface="Euphemia"/>
+        <a:font script="Cher" typeface="Plantagenet Cherokee"/>
+        <a:font script="Yiii" typeface="Microsoft Yi Baiti"/>
+        <a:font script="Tibt" typeface="Microsoft Himalaya"/>
+        <a:font script="Thaa" typeface="MV Boli"/>
+        <a:font script="Deva" typeface="Mangal"/>
+        <a:font script="Telu" typeface="Gautami"/>
+        <a:font script="Taml" typeface="Latha"/>
+        <a:font script="Syrc" typeface="Estrangelo Edessa"/>
+        <a:font script="Orya" typeface="Kalinga"/>
+        <a:font script="Mlym" typeface="Kartika"/>
+        <a:font script="Laoo" typeface="DokChampa"/>
+        <a:font script="Sinh" typeface="Iskoola Pota"/>
+        <a:font script="Mong" typeface="Mongolian Baiti"/>
+        <a:font script="Viet" typeface="Arial"/>
+        <a:font script="Uigh" typeface="Microsoft Uighur"/>
+        <a:font script="Geor" typeface="Sylfaen"/>
+        <a:font script="Armn" typeface="Arial"/>
+        <a:font script="Bugi" typeface="Leelawadee UI"/>
+        <a:font script="Bopo" typeface="Microsoft JhengHei"/>
+        <a:font script="Java" typeface="Javanese Text"/>
+        <a:font script="Lisu" typeface="Segoe UI"/>
+        <a:font script="Mymr" typeface="Myanmar Text"/>
+        <a:font script="Nkoo" typeface="Ebrima"/>
+        <a:font script="Olck" typeface="Nirmala UI"/>
+        <a:font script="Osma" typeface="Ebrima"/>
+        <a:font script="Phag" typeface="Phagspa"/>
+        <a:font script="Syrn" typeface="Estrangelo Edessa"/>
+        <a:font script="Syrj" typeface="Estrangelo Edessa"/>
+        <a:font script="Syre" typeface="Estrangelo Edessa"/>
+        <a:font script="Sora" typeface="Nirmala UI"/>
+        <a:font script="Tale" typeface="Microsoft Tai Le"/>
+        <a:font script="Talu" typeface="Microsoft New Tai Lue"/>
+        <a:font script="Tfng" typeface="Ebrima"/>
+      </a:minorFont>
+    </a:fontScheme>
+    <a:fmtScheme name="Office">
+      <a:fillStyleLst>
+        <a:solidFill>
+          <a:schemeClr val="phClr"/>
+        </a:solidFill>
+        <a:gradFill rotWithShape="1">
+          <a:gsLst>
+            <a:gs pos="0">
+              <a:schemeClr val="phClr">
+                <a:lumMod val="110000"/>
+                <a:satMod val="105000"/>
+                <a:tint val="67000"/>
+              </a:schemeClr>
+            </a:gs>
+            <a:gs pos="50000">
+              <a:schemeClr val="phClr">
+                <a:lumMod val="105000"/>
+                <a:satMod val="103000"/>
+                <a:tint val="73000"/>
+              </a:schemeClr>
+            </a:gs>
+            <a:gs pos="100000">
+              <a:schemeClr val="phClr">
+                <a:lumMod val="105000"/>
+                <a:satMod val="109000"/>
+                <a:tint val="81000"/>
+              </a:schemeClr>
+            </a:gs>
+          </a:gsLst>
+          <a:lin ang="5400000" scaled="0"/>
+        </a:gradFill>
+        <a:gradFill rotWithShape="1">
+          <a:gsLst>
+            <a:gs pos="0">
+              <a:schemeClr val="phClr">
+                <a:satMod val="103000"/>
+                <a:lumMod val="102000"/>
+                <a:tint val="94000"/>
+              </a:schemeClr>
+            </a:gs>
+            <a:gs pos="50000">
+              <a:schemeClr val="phClr">
+                <a:satMod val="110000"/>
+                <a:lumMod val="100000"/>
+                <a:shade val="100000"/>
+              </a:schemeClr>
+            </a:gs>
+            <a:gs pos="100000">
+              <a:schemeClr val="phClr">
+                <a:lumMod val="99000"/>
+                <a:satMod val="120000"/>
+                <a:shade val="78000"/>
+              </a:schemeClr>
+            </a:gs>
+          </a:gsLst>
+          <a:lin ang="5400000" scaled="0"/>
+        </a:gradFill>
+      </a:fillStyleLst>
+      <a:lnStyleLst>
+        <a:ln w="12700" cap="flat" cmpd="sng" algn="ctr">
+          <a:solidFill>
+            <a:schemeClr val="phClr"/>
+          </a:solidFill>
+          <a:prstDash val="solid"/>
+          <a:miter lim="800000"/>
+        </a:ln>
+        <a:ln w="19050" cap="flat" cmpd="sng" algn="ctr">
+          <a:solidFill>
+            <a:schemeClr val="phClr"/>
+          </a:solidFill>
+          <a:prstDash val="solid"/>
+          <a:miter lim="800000"/>
+        </a:ln>
+        <a:ln w="25400" cap="flat" cmpd="sng" algn="ctr">
+          <a:solidFill>
+            <a:schemeClr val="phClr"/>
+          </a:solidFill>
+          <a:prstDash val="solid"/>
+          <a:miter lim="800000"/>
+        </a:ln>
+      </a:lnStyleLst>
+      <a:effectStyleLst>
+        <a:effectStyle>
+          <a:effectLst/>
+        </a:effectStyle>
+        <a:effectStyle>
+          <a:effectLst/>
+        </a:effectStyle>
+        <a:effectStyle>
+          <a:effectLst>
+            <a:outerShdw blurRad="57150" dist="19050" dir="5400000" algn="ctr" rotWithShape="0">
+              <a:srgbClr val="000000">
+                <a:alpha val="63000"/>
+              </a:srgbClr>
+            </a:outerShdw>
+          </a:effectLst>
+        </a:effectStyle>
+      </a:effectStyleLst>
+      <a:bgFillStyleLst>
+        <a:solidFill>
+          <a:schemeClr val="phClr"/>
+        </a:solidFill>
+        <a:solidFill>
+          <a:schemeClr val="phClr">
+            <a:tint val="95000"/>
+            <a:satMod val="170000"/>
+          </a:schemeClr>
+        </a:solidFill>
+        <a:gradFill rotWithShape="1">
+          <a:gsLst>
+            <a:gs pos="0">
+              <a:schemeClr val="phClr">
+                <a:tint val="93000"/>
+                <a:satMod val="150000"/>
+                <a:shade val="98000"/>
+                <a:lumMod val="102000"/>
+              </a:schemeClr>
+            </a:gs>
+            <a:gs pos="50000">
+              <a:schemeClr val="phClr">
+                <a:tint val="98000"/>
+                <a:satMod val="130000"/>
+                <a:shade val="90000"/>
+                <a:lumMod val="103000"/>
+              </a:schemeClr>
+            </a:gs>
+            <a:gs pos="100000">
+              <a:schemeClr val="phClr">
+                <a:shade val="63000"/>
+                <a:satMod val="120000"/>
+              </a:schemeClr>
+            </a:gs>
+          </a:gsLst>
+          <a:lin ang="5400000" scaled="0"/>
+        </a:gradFill>
+      </a:bgFillStyleLst>
+    </a:fmtScheme>
+  </a:themeElements>
+  <a:objectDefaults>
+    <a:lnDef>
+      <a:spPr/>
+      <a:bodyPr/>
+      <a:lstStyle/>
+      <a:style>
+        <a:lnRef idx="2">
+          <a:schemeClr val="accent1"/>
+        </a:lnRef>
+        <a:fillRef idx="0">
+          <a:schemeClr val="accent1"/>
+        </a:fillRef>
+        <a:effectRef idx="1">
+          <a:schemeClr val="accent1"/>
+        </a:effectRef>
+        <a:fontRef idx="minor">
+          <a:schemeClr val="tx1"/>
+        </a:fontRef>
+      </a:style>
+    </a:lnDef>
+  </a:objectDefaults>
+  <a:extraClrSchemeLst/>
+  <a:extLst>
+    <a:ext uri="{05A4C25C-085E-4340-85A3-A5531E510DB2}">
+      <thm15:themeFamily xmlns:thm15="http://schemas.microsoft.com/office/thememl/2012/main" name="Office Theme" id="{2E142A2C-CD16-42D6-873A-C26D2A0506FA}" vid="{1BDDFF52-6CD6-40A5-AB3C-68EB2F1E4D0A}"/>
+    </a:ext>
+  </a:extLst>
+</a:theme>
+</file>
+
+<file path=docMetadata/LabelInfo.xml><?xml version="1.0" encoding="utf-8"?>
+<clbl:labelList xmlns:clbl="http://schemas.microsoft.com/office/2020/mipLabelMetadata">
+  <clbl:label id="{f42aa342-8706-4288-bd11-ebb85995028c}" enabled="1" method="Standard" siteId="{72f988bf-86f1-41af-91ab-2d7cd011db47}" contentBits="0" removed="0"/>
+</clbl:labelList>
 </file>